--- a/Grammar_Mastery/06_Pronouns/GM-PRO-05_Relative_Pronouns.pptx
+++ b/Grammar_Mastery/06_Pronouns/GM-PRO-05_Relative_Pronouns.pptx
@@ -532,7 +532,11 @@
           <a:lstStyle/>
           <a:p>
             <a:r>
-              <a:rPr lang="en-US" dirty="0"/>
+              <a:rPr lang="ar-SA" dirty="0">
+                <a:latin typeface="Amiri" pitchFamily="2" charset="-78"/>
+                <a:ea typeface="Amiri" pitchFamily="2" charset="-78"/>
+                <a:cs typeface="Amiri" pitchFamily="2" charset="-78"/>
+              </a:rPr>
               <a:t>LESSON AT A GLANCE — planned for 56 minutes, leaving about 4 minutes for Teams delays.
 0–1 Welcome · 1–2 Lesson map · 2–9 Do Now + answers · 9–10 Objectives · 10–13 Grammar words · 13–24 The grammar, step by step · 24–26 Quick check · 26–29 I Do · 29–38 We Do (sort, repair, practise) · 38–49 You Do (read, speak, write on your route) · 49–54 Feedback (model, self-check, exit ticket) · 54–56 Preparation.
 FLEX slides are optional: use them if the class is moving quickly; otherwise the same activities are on the website for homework.
@@ -1521,7 +1525,11 @@
           <a:lstStyle/>
           <a:p>
             <a:r>
-              <a:rPr lang="en-US" dirty="0"/>
+              <a:rPr lang="ar-SA" dirty="0">
+                <a:latin typeface="Amiri" pitchFamily="2" charset="-78"/>
+                <a:ea typeface="Amiri" pitchFamily="2" charset="-78"/>
+                <a:cs typeface="Amiri" pitchFamily="2" charset="-78"/>
+              </a:rPr>
               <a:t>WELCOME (1 min) — while students join.
 • Greet each student by name as they arrive: السَّلَامُ عَلَيْكُمْ. Take the register (Pastoral Tracker: attendance 0/1).
 • 2-MINUTE CHECK-IN (SEND training): a private chat to any student who seemed unsettled last lesson — “Are you okay today? 👍 / 👎”.
@@ -3978,6 +3986,7 @@
                   <a:srgbClr val="D4AF37"/>
                 </a:solidFill>
                 <a:latin typeface="Amiri" pitchFamily="2" charset="-78"/>
+                <a:ea typeface="Amiri" pitchFamily="2" charset="-78"/>
                 <a:cs typeface="Amiri" pitchFamily="2" charset="-78"/>
               </a:rPr>
               <a:t>م</a:t>
@@ -4184,6 +4193,7 @@
                   <a:srgbClr val="D4AF37"/>
                 </a:solidFill>
                 <a:latin typeface="Amiri" pitchFamily="2" charset="-78"/>
+                <a:ea typeface="Amiri" pitchFamily="2" charset="-78"/>
                 <a:cs typeface="Amiri" pitchFamily="2" charset="-78"/>
               </a:rPr>
               <a:t>الْأَسْمَاءُ الْمَوْصُولَةُ</a:t>
@@ -4641,6 +4651,7 @@
                   <a:srgbClr val="D4AF37"/>
                 </a:solidFill>
                 <a:latin typeface="Amiri" pitchFamily="2" charset="-78"/>
+                <a:ea typeface="Amiri" pitchFamily="2" charset="-78"/>
                 <a:cs typeface="Amiri" pitchFamily="2" charset="-78"/>
               </a:rPr>
               <a:t>م</a:t>
@@ -4961,6 +4972,7 @@
                   <a:srgbClr val="8A6D1E"/>
                 </a:solidFill>
                 <a:latin typeface="Amiri" pitchFamily="2" charset="-78"/>
+                <a:ea typeface="Amiri" pitchFamily="2" charset="-78"/>
                 <a:cs typeface="Amiri" pitchFamily="2" charset="-78"/>
               </a:rPr>
               <a:t>التَّعْرِيفُ وَالضَّمِيرُ الْعَائِدُ</a:t>
@@ -5241,6 +5253,7 @@
                   <a:srgbClr val="1B3B6F"/>
                 </a:solidFill>
                 <a:latin typeface="Amiri" pitchFamily="2" charset="-78"/>
+                <a:ea typeface="Amiri" pitchFamily="2" charset="-78"/>
                 <a:cs typeface="Amiri" pitchFamily="2" charset="-78"/>
               </a:rPr>
               <a:t>جَاءَ الطَّالِبُ الَّذِي فَازَ.</a:t>
@@ -5447,6 +5460,7 @@
                   <a:srgbClr val="1B3B6F"/>
                 </a:solidFill>
                 <a:latin typeface="Amiri" pitchFamily="2" charset="-78"/>
+                <a:ea typeface="Amiri" pitchFamily="2" charset="-78"/>
                 <a:cs typeface="Amiri" pitchFamily="2" charset="-78"/>
               </a:rPr>
               <a:t>جَاءَ طَالِبٌ فَازَ فِي الْمُسَابَقَةِ.</a:t>
@@ -5588,6 +5602,7 @@
                   <a:srgbClr val="1B3B6F"/>
                 </a:solidFill>
                 <a:latin typeface="Amiri" pitchFamily="2" charset="-78"/>
+                <a:ea typeface="Amiri" pitchFamily="2" charset="-78"/>
                 <a:cs typeface="Amiri" pitchFamily="2" charset="-78"/>
               </a:rPr>
               <a:t>هَذَا هُوَ الْكِتَابُ الَّذِي قَرَأْتُهُ.</a:t>
@@ -5729,6 +5744,7 @@
                   <a:srgbClr val="1B3B6F"/>
                 </a:solidFill>
                 <a:latin typeface="Amiri" pitchFamily="2" charset="-78"/>
+                <a:ea typeface="Amiri" pitchFamily="2" charset="-78"/>
                 <a:cs typeface="Amiri" pitchFamily="2" charset="-78"/>
               </a:rPr>
               <a:t>هَذِهِ هِيَ الْمَدْرَسَةُ الَّتِي أَدْرُسُ فِيهَا.</a:t>
@@ -5870,6 +5886,7 @@
                   <a:srgbClr val="1B3B6F"/>
                 </a:solidFill>
                 <a:latin typeface="Amiri" pitchFamily="2" charset="-78"/>
+                <a:ea typeface="Amiri" pitchFamily="2" charset="-78"/>
                 <a:cs typeface="Amiri" pitchFamily="2" charset="-78"/>
               </a:rPr>
               <a:t>الطَّالِبُ الَّذِي كِتَابُهُ جَدِيدٌ</a:t>
@@ -6079,6 +6096,7 @@
                   <a:srgbClr val="D4AF37"/>
                 </a:solidFill>
                 <a:latin typeface="Amiri" pitchFamily="2" charset="-78"/>
+                <a:ea typeface="Amiri" pitchFamily="2" charset="-78"/>
                 <a:cs typeface="Amiri" pitchFamily="2" charset="-78"/>
               </a:rPr>
               <a:t>م</a:t>
@@ -6399,6 +6417,7 @@
                   <a:srgbClr val="8A6D1E"/>
                 </a:solidFill>
                 <a:latin typeface="Amiri" pitchFamily="2" charset="-78"/>
+                <a:ea typeface="Amiri" pitchFamily="2" charset="-78"/>
                 <a:cs typeface="Amiri" pitchFamily="2" charset="-78"/>
               </a:rPr>
               <a:t>فَحْصٌ سَرِيعٌ</a:t>
@@ -6673,6 +6692,7 @@
                   <a:srgbClr val="1F2A37"/>
                 </a:solidFill>
                 <a:latin typeface="Amiri" pitchFamily="2" charset="-78"/>
+                <a:ea typeface="Amiri" pitchFamily="2" charset="-78"/>
                 <a:cs typeface="Amiri" pitchFamily="2" charset="-78"/>
               </a:rPr>
               <a:t>الْمُعَلِّمَةُ الَّذِي سَاعَدَتْنِي</a:t>
@@ -6774,6 +6794,7 @@
                   <a:srgbClr val="1F2A37"/>
                 </a:solidFill>
                 <a:latin typeface="Amiri" pitchFamily="2" charset="-78"/>
+                <a:ea typeface="Amiri" pitchFamily="2" charset="-78"/>
                 <a:cs typeface="Amiri" pitchFamily="2" charset="-78"/>
               </a:rPr>
               <a:t>الْمُعَلِّمَةُ الَّذِينَ سَاعَدُونِي</a:t>
@@ -6875,6 +6896,7 @@
                   <a:srgbClr val="1F2A37"/>
                 </a:solidFill>
                 <a:latin typeface="Amiri" pitchFamily="2" charset="-78"/>
+                <a:ea typeface="Amiri" pitchFamily="2" charset="-78"/>
                 <a:cs typeface="Amiri" pitchFamily="2" charset="-78"/>
               </a:rPr>
               <a:t>الْمُعَلِّمَةُ الَّتِي سَاعَدَتْنِي</a:t>
@@ -7111,6 +7133,7 @@
                   <a:srgbClr val="1F2A37"/>
                 </a:solidFill>
                 <a:latin typeface="Amiri" pitchFamily="2" charset="-78"/>
+                <a:ea typeface="Amiri" pitchFamily="2" charset="-78"/>
                 <a:cs typeface="Amiri" pitchFamily="2" charset="-78"/>
               </a:rPr>
               <a:t>اللَّاعِبُونَ الَّذِينَ فَازُوا</a:t>
@@ -7212,6 +7235,7 @@
                   <a:srgbClr val="1F2A37"/>
                 </a:solidFill>
                 <a:latin typeface="Amiri" pitchFamily="2" charset="-78"/>
+                <a:ea typeface="Amiri" pitchFamily="2" charset="-78"/>
                 <a:cs typeface="Amiri" pitchFamily="2" charset="-78"/>
               </a:rPr>
               <a:t>اللَّاعِبُونَ الَّذِي فَازُوا</a:t>
@@ -7313,6 +7337,7 @@
                   <a:srgbClr val="1F2A37"/>
                 </a:solidFill>
                 <a:latin typeface="Amiri" pitchFamily="2" charset="-78"/>
+                <a:ea typeface="Amiri" pitchFamily="2" charset="-78"/>
                 <a:cs typeface="Amiri" pitchFamily="2" charset="-78"/>
               </a:rPr>
               <a:t>اللَّاعِبُونَ الَّتِي فَازُوا</a:t>
@@ -7549,6 +7574,7 @@
                   <a:srgbClr val="1F2A37"/>
                 </a:solidFill>
                 <a:latin typeface="Amiri" pitchFamily="2" charset="-78"/>
+                <a:ea typeface="Amiri" pitchFamily="2" charset="-78"/>
                 <a:cs typeface="Amiri" pitchFamily="2" charset="-78"/>
               </a:rPr>
               <a:t>الْكُتُبُ الَّذِينَ اشْتَرَيْتُهُمْ</a:t>
@@ -7650,6 +7676,7 @@
                   <a:srgbClr val="1F2A37"/>
                 </a:solidFill>
                 <a:latin typeface="Amiri" pitchFamily="2" charset="-78"/>
+                <a:ea typeface="Amiri" pitchFamily="2" charset="-78"/>
                 <a:cs typeface="Amiri" pitchFamily="2" charset="-78"/>
               </a:rPr>
               <a:t>الْكُتُبُ الَّتِي اشْتَرَيْتُهَا</a:t>
@@ -7751,6 +7778,7 @@
                   <a:srgbClr val="1F2A37"/>
                 </a:solidFill>
                 <a:latin typeface="Amiri" pitchFamily="2" charset="-78"/>
+                <a:ea typeface="Amiri" pitchFamily="2" charset="-78"/>
                 <a:cs typeface="Amiri" pitchFamily="2" charset="-78"/>
               </a:rPr>
               <a:t>الْكُتُبُ الَّذِي اشْتَرَيْتُهُ</a:t>
@@ -7987,6 +8015,7 @@
                   <a:srgbClr val="1F2A37"/>
                 </a:solidFill>
                 <a:latin typeface="Amiri" pitchFamily="2" charset="-78"/>
+                <a:ea typeface="Amiri" pitchFamily="2" charset="-78"/>
                 <a:cs typeface="Amiri" pitchFamily="2" charset="-78"/>
               </a:rPr>
               <a:t>جَاءَتْ بِنْتٌ تَتَكَلَّمُ الْعَرَبِيَّةَ.</a:t>
@@ -8088,6 +8117,7 @@
                   <a:srgbClr val="1F2A37"/>
                 </a:solidFill>
                 <a:latin typeface="Amiri" pitchFamily="2" charset="-78"/>
+                <a:ea typeface="Amiri" pitchFamily="2" charset="-78"/>
                 <a:cs typeface="Amiri" pitchFamily="2" charset="-78"/>
               </a:rPr>
               <a:t>جَاءَتْ بِنْتٌ الَّتِي تَتَكَلَّمُ الْعَرَبِيَّةَ.</a:t>
@@ -8189,6 +8219,7 @@
                   <a:srgbClr val="1F2A37"/>
                 </a:solidFill>
                 <a:latin typeface="Amiri" pitchFamily="2" charset="-78"/>
+                <a:ea typeface="Amiri" pitchFamily="2" charset="-78"/>
                 <a:cs typeface="Amiri" pitchFamily="2" charset="-78"/>
               </a:rPr>
               <a:t>جَاءَتْ الْبِنْتُ الَّذِي تَتَكَلَّمُ الْعَرَبِيَّةَ.</a:t>
@@ -8322,6 +8353,7 @@
                   <a:srgbClr val="D4AF37"/>
                 </a:solidFill>
                 <a:latin typeface="Amiri" pitchFamily="2" charset="-78"/>
+                <a:ea typeface="Amiri" pitchFamily="2" charset="-78"/>
                 <a:cs typeface="Amiri" pitchFamily="2" charset="-78"/>
               </a:rPr>
               <a:t>م</a:t>
@@ -8642,6 +8674,7 @@
                   <a:srgbClr val="8A6D1E"/>
                 </a:solidFill>
                 <a:latin typeface="Amiri" pitchFamily="2" charset="-78"/>
+                <a:ea typeface="Amiri" pitchFamily="2" charset="-78"/>
                 <a:cs typeface="Amiri" pitchFamily="2" charset="-78"/>
               </a:rPr>
               <a:t>الإِجَابَاتُ وَالتَّعْلِيلُ</a:t>
@@ -8916,6 +8949,7 @@
                   <a:srgbClr val="9AA1AB"/>
                 </a:solidFill>
                 <a:latin typeface="Amiri" pitchFamily="2" charset="-78"/>
+                <a:ea typeface="Amiri" pitchFamily="2" charset="-78"/>
                 <a:cs typeface="Amiri" pitchFamily="2" charset="-78"/>
               </a:rPr>
               <a:t>الْمُعَلِّمَةُ الَّذِي سَاعَدَتْنِي</a:t>
@@ -9017,6 +9051,7 @@
                   <a:srgbClr val="9AA1AB"/>
                 </a:solidFill>
                 <a:latin typeface="Amiri" pitchFamily="2" charset="-78"/>
+                <a:ea typeface="Amiri" pitchFamily="2" charset="-78"/>
                 <a:cs typeface="Amiri" pitchFamily="2" charset="-78"/>
               </a:rPr>
               <a:t>الْمُعَلِّمَةُ الَّذِينَ سَاعَدُونِي</a:t>
@@ -9145,6 +9180,7 @@
                   <a:srgbClr val="1F2A37"/>
                 </a:solidFill>
                 <a:latin typeface="Amiri" pitchFamily="2" charset="-78"/>
+                <a:ea typeface="Amiri" pitchFamily="2" charset="-78"/>
                 <a:cs typeface="Amiri" pitchFamily="2" charset="-78"/>
               </a:rPr>
               <a:t>الْمُعَلِّمَةُ الَّتِي سَاعَدَتْنِي</a:t>
@@ -9446,6 +9482,7 @@
                   <a:srgbClr val="1F2A37"/>
                 </a:solidFill>
                 <a:latin typeface="Amiri" pitchFamily="2" charset="-78"/>
+                <a:ea typeface="Amiri" pitchFamily="2" charset="-78"/>
                 <a:cs typeface="Amiri" pitchFamily="2" charset="-78"/>
               </a:rPr>
               <a:t>اللَّاعِبُونَ الَّذِينَ فَازُوا</a:t>
@@ -9547,6 +9584,7 @@
                   <a:srgbClr val="9AA1AB"/>
                 </a:solidFill>
                 <a:latin typeface="Amiri" pitchFamily="2" charset="-78"/>
+                <a:ea typeface="Amiri" pitchFamily="2" charset="-78"/>
                 <a:cs typeface="Amiri" pitchFamily="2" charset="-78"/>
               </a:rPr>
               <a:t>اللَّاعِبُونَ الَّذِي فَازُوا</a:t>
@@ -9648,6 +9686,7 @@
                   <a:srgbClr val="9AA1AB"/>
                 </a:solidFill>
                 <a:latin typeface="Amiri" pitchFamily="2" charset="-78"/>
+                <a:ea typeface="Amiri" pitchFamily="2" charset="-78"/>
                 <a:cs typeface="Amiri" pitchFamily="2" charset="-78"/>
               </a:rPr>
               <a:t>اللَّاعِبُونَ الَّتِي فَازُوا</a:t>
@@ -9922,6 +9961,7 @@
                   <a:srgbClr val="9AA1AB"/>
                 </a:solidFill>
                 <a:latin typeface="Amiri" pitchFamily="2" charset="-78"/>
+                <a:ea typeface="Amiri" pitchFamily="2" charset="-78"/>
                 <a:cs typeface="Amiri" pitchFamily="2" charset="-78"/>
               </a:rPr>
               <a:t>الْكُتُبُ الَّذِينَ اشْتَرَيْتُهُمْ</a:t>
@@ -10050,6 +10090,7 @@
                   <a:srgbClr val="1F2A37"/>
                 </a:solidFill>
                 <a:latin typeface="Amiri" pitchFamily="2" charset="-78"/>
+                <a:ea typeface="Amiri" pitchFamily="2" charset="-78"/>
                 <a:cs typeface="Amiri" pitchFamily="2" charset="-78"/>
               </a:rPr>
               <a:t>الْكُتُبُ الَّتِي اشْتَرَيْتُهَا</a:t>
@@ -10151,6 +10192,7 @@
                   <a:srgbClr val="9AA1AB"/>
                 </a:solidFill>
                 <a:latin typeface="Amiri" pitchFamily="2" charset="-78"/>
+                <a:ea typeface="Amiri" pitchFamily="2" charset="-78"/>
                 <a:cs typeface="Amiri" pitchFamily="2" charset="-78"/>
               </a:rPr>
               <a:t>الْكُتُبُ الَّذِي اشْتَرَيْتُهُ</a:t>
@@ -10452,6 +10494,7 @@
                   <a:srgbClr val="1F2A37"/>
                 </a:solidFill>
                 <a:latin typeface="Amiri" pitchFamily="2" charset="-78"/>
+                <a:ea typeface="Amiri" pitchFamily="2" charset="-78"/>
                 <a:cs typeface="Amiri" pitchFamily="2" charset="-78"/>
               </a:rPr>
               <a:t>جَاءَتْ بِنْتٌ تَتَكَلَّمُ الْعَرَبِيَّةَ.</a:t>
@@ -10553,6 +10596,7 @@
                   <a:srgbClr val="9AA1AB"/>
                 </a:solidFill>
                 <a:latin typeface="Amiri" pitchFamily="2" charset="-78"/>
+                <a:ea typeface="Amiri" pitchFamily="2" charset="-78"/>
                 <a:cs typeface="Amiri" pitchFamily="2" charset="-78"/>
               </a:rPr>
               <a:t>جَاءَتْ بِنْتٌ الَّتِي تَتَكَلَّمُ الْعَرَبِيَّةَ.</a:t>
@@ -10654,6 +10698,7 @@
                   <a:srgbClr val="9AA1AB"/>
                 </a:solidFill>
                 <a:latin typeface="Amiri" pitchFamily="2" charset="-78"/>
+                <a:ea typeface="Amiri" pitchFamily="2" charset="-78"/>
                 <a:cs typeface="Amiri" pitchFamily="2" charset="-78"/>
               </a:rPr>
               <a:t>جَاءَتْ الْبِنْتُ الَّذِي تَتَكَلَّمُ الْعَرَبِيَّةَ.</a:t>
@@ -10825,6 +10870,7 @@
                   <a:srgbClr val="D4AF37"/>
                 </a:solidFill>
                 <a:latin typeface="Amiri" pitchFamily="2" charset="-78"/>
+                <a:ea typeface="Amiri" pitchFamily="2" charset="-78"/>
                 <a:cs typeface="Amiri" pitchFamily="2" charset="-78"/>
               </a:rPr>
               <a:t>م</a:t>
@@ -11145,6 +11191,7 @@
                   <a:srgbClr val="8A6D1E"/>
                 </a:solidFill>
                 <a:latin typeface="Amiri" pitchFamily="2" charset="-78"/>
+                <a:ea typeface="Amiri" pitchFamily="2" charset="-78"/>
                 <a:cs typeface="Amiri" pitchFamily="2" charset="-78"/>
               </a:rPr>
               <a:t>شَاهِدْ ثُمَّ اُكْتُبْ</a:t>
@@ -11356,6 +11403,7 @@
                   <a:srgbClr val="1B3B6F"/>
                 </a:solidFill>
                 <a:latin typeface="Amiri" pitchFamily="2" charset="-78"/>
+                <a:ea typeface="Amiri" pitchFamily="2" charset="-78"/>
                 <a:cs typeface="Amiri" pitchFamily="2" charset="-78"/>
               </a:rPr>
               <a:t>هَذَا هُوَ الْكِتَابُ.</a:t>
@@ -11605,6 +11653,7 @@
                   <a:srgbClr val="1B3B6F"/>
                 </a:solidFill>
                 <a:latin typeface="Amiri" pitchFamily="2" charset="-78"/>
+                <a:ea typeface="Amiri" pitchFamily="2" charset="-78"/>
                 <a:cs typeface="Amiri" pitchFamily="2" charset="-78"/>
               </a:rPr>
               <a:t>قَرَأْتُ الْكِتَابَ.</a:t>
@@ -11854,6 +11903,7 @@
                   <a:srgbClr val="1B3B6F"/>
                 </a:solidFill>
                 <a:latin typeface="Amiri" pitchFamily="2" charset="-78"/>
+                <a:ea typeface="Amiri" pitchFamily="2" charset="-78"/>
                 <a:cs typeface="Amiri" pitchFamily="2" charset="-78"/>
               </a:rPr>
               <a:t>الَّذِي</a:t>
@@ -12103,6 +12153,7 @@
                   <a:srgbClr val="1B3B6F"/>
                 </a:solidFill>
                 <a:latin typeface="Amiri" pitchFamily="2" charset="-78"/>
+                <a:ea typeface="Amiri" pitchFamily="2" charset="-78"/>
                 <a:cs typeface="Amiri" pitchFamily="2" charset="-78"/>
               </a:rPr>
               <a:t>الْكِتَابُ الَّذِي قَرَأْتُهُ</a:t>
@@ -12405,6 +12456,7 @@
                   <a:srgbClr val="1B3B6F"/>
                 </a:solidFill>
                 <a:latin typeface="Amiri" pitchFamily="2" charset="-78"/>
+                <a:ea typeface="Amiri" pitchFamily="2" charset="-78"/>
                 <a:cs typeface="Amiri" pitchFamily="2" charset="-78"/>
               </a:rPr>
               <a:t>هَذَا هُوَ الْكِتَابُ </a:t>
@@ -12418,6 +12470,7 @@
                   <a:srgbClr val="0E7C86"/>
                 </a:solidFill>
                 <a:latin typeface="Amiri" pitchFamily="2" charset="-78"/>
+                <a:ea typeface="Amiri" pitchFamily="2" charset="-78"/>
                 <a:cs typeface="Amiri" pitchFamily="2" charset="-78"/>
               </a:rPr>
               <a:t>الَّذِي</a:t>
@@ -12444,6 +12497,7 @@
                   <a:srgbClr val="D6336C"/>
                 </a:solidFill>
                 <a:latin typeface="Amiri" pitchFamily="2" charset="-78"/>
+                <a:ea typeface="Amiri" pitchFamily="2" charset="-78"/>
                 <a:cs typeface="Amiri" pitchFamily="2" charset="-78"/>
               </a:rPr>
               <a:t>قَرَأْتُهُ</a:t>
@@ -12457,6 +12511,7 @@
                   <a:srgbClr val="1B3B6F"/>
                 </a:solidFill>
                 <a:latin typeface="Amiri" pitchFamily="2" charset="-78"/>
+                <a:ea typeface="Amiri" pitchFamily="2" charset="-78"/>
                 <a:cs typeface="Amiri" pitchFamily="2" charset="-78"/>
               </a:rPr>
               <a:t>، وَهَذِهِ هِيَ الْمَكْتَبَةُ </a:t>
@@ -12470,6 +12525,7 @@
                   <a:srgbClr val="0E7C86"/>
                 </a:solidFill>
                 <a:latin typeface="Amiri" pitchFamily="2" charset="-78"/>
+                <a:ea typeface="Amiri" pitchFamily="2" charset="-78"/>
                 <a:cs typeface="Amiri" pitchFamily="2" charset="-78"/>
               </a:rPr>
               <a:t>الَّتِي</a:t>
@@ -12483,6 +12539,7 @@
                   <a:srgbClr val="1B3B6F"/>
                 </a:solidFill>
                 <a:latin typeface="Amiri" pitchFamily="2" charset="-78"/>
+                <a:ea typeface="Amiri" pitchFamily="2" charset="-78"/>
                 <a:cs typeface="Amiri" pitchFamily="2" charset="-78"/>
               </a:rPr>
               <a:t> أَقْرَأُ </a:t>
@@ -12496,6 +12553,7 @@
                   <a:srgbClr val="D6336C"/>
                 </a:solidFill>
                 <a:latin typeface="Amiri" pitchFamily="2" charset="-78"/>
+                <a:ea typeface="Amiri" pitchFamily="2" charset="-78"/>
                 <a:cs typeface="Amiri" pitchFamily="2" charset="-78"/>
               </a:rPr>
               <a:t>فِيهَا</a:t>
@@ -12680,6 +12738,7 @@
                   <a:srgbClr val="D4AF37"/>
                 </a:solidFill>
                 <a:latin typeface="Amiri" pitchFamily="2" charset="-78"/>
+                <a:ea typeface="Amiri" pitchFamily="2" charset="-78"/>
                 <a:cs typeface="Amiri" pitchFamily="2" charset="-78"/>
               </a:rPr>
               <a:t>م</a:t>
@@ -13000,6 +13059,7 @@
                   <a:srgbClr val="8A6D1E"/>
                 </a:solidFill>
                 <a:latin typeface="Amiri" pitchFamily="2" charset="-78"/>
+                <a:ea typeface="Amiri" pitchFamily="2" charset="-78"/>
                 <a:cs typeface="Amiri" pitchFamily="2" charset="-78"/>
               </a:rPr>
               <a:t>جُمَلٌ نَمُوذَجِيَّةٌ</a:t>
@@ -13173,6 +13233,7 @@
                   <a:srgbClr val="1B3B6F"/>
                 </a:solidFill>
                 <a:latin typeface="Amiri" pitchFamily="2" charset="-78"/>
+                <a:ea typeface="Amiri" pitchFamily="2" charset="-78"/>
                 <a:cs typeface="Amiri" pitchFamily="2" charset="-78"/>
               </a:rPr>
               <a:t>أَعْرِفُ الْوَلَدَ الَّذِي يَسْكُنُ هُنَا.</a:t>
@@ -13362,6 +13423,7 @@
                   <a:srgbClr val="1B3B6F"/>
                 </a:solidFill>
                 <a:latin typeface="Amiri" pitchFamily="2" charset="-78"/>
+                <a:ea typeface="Amiri" pitchFamily="2" charset="-78"/>
                 <a:cs typeface="Amiri" pitchFamily="2" charset="-78"/>
               </a:rPr>
               <a:t>هَذِهِ هِيَ الْمُعَلِّمَةُ الَّتِي تُدَرِّسُنَا.</a:t>
@@ -13551,6 +13613,7 @@
                   <a:srgbClr val="1B3B6F"/>
                 </a:solidFill>
                 <a:latin typeface="Amiri" pitchFamily="2" charset="-78"/>
+                <a:ea typeface="Amiri" pitchFamily="2" charset="-78"/>
                 <a:cs typeface="Amiri" pitchFamily="2" charset="-78"/>
               </a:rPr>
               <a:t>شَكَرْنَا الطُّلَّابَ الَّذِينَ سَاعَدُونَا.</a:t>
@@ -13740,6 +13803,7 @@
                   <a:srgbClr val="1B3B6F"/>
                 </a:solidFill>
                 <a:latin typeface="Amiri" pitchFamily="2" charset="-78"/>
+                <a:ea typeface="Amiri" pitchFamily="2" charset="-78"/>
                 <a:cs typeface="Amiri" pitchFamily="2" charset="-78"/>
               </a:rPr>
               <a:t>الْمَشْرُوعُ الَّذِي أَعْلَنَتْهُ الْمَدْرَسَةُ مُفِيدٌ.</a:t>
@@ -13927,6 +13991,7 @@
                   <a:srgbClr val="D4AF37"/>
                 </a:solidFill>
                 <a:latin typeface="Amiri" pitchFamily="2" charset="-78"/>
+                <a:ea typeface="Amiri" pitchFamily="2" charset="-78"/>
                 <a:cs typeface="Amiri" pitchFamily="2" charset="-78"/>
               </a:rPr>
               <a:t>م</a:t>
@@ -14247,6 +14312,7 @@
                   <a:srgbClr val="8A6D1E"/>
                 </a:solidFill>
                 <a:latin typeface="Amiri" pitchFamily="2" charset="-78"/>
+                <a:ea typeface="Amiri" pitchFamily="2" charset="-78"/>
                 <a:cs typeface="Amiri" pitchFamily="2" charset="-78"/>
               </a:rPr>
               <a:t>ابْنِ الْجِسْرَ</a:t>
@@ -14357,6 +14423,7 @@
                   <a:srgbClr val="1B3B6F"/>
                 </a:solidFill>
                 <a:latin typeface="Amiri" pitchFamily="2" charset="-78"/>
+                <a:ea typeface="Amiri" pitchFamily="2" charset="-78"/>
                 <a:cs typeface="Amiri" pitchFamily="2" charset="-78"/>
               </a:rPr>
               <a:t>الْمُدِيرُ</a:t>
@@ -14429,6 +14496,7 @@
                   <a:srgbClr val="1B3B6F"/>
                 </a:solidFill>
                 <a:latin typeface="Amiri" pitchFamily="2" charset="-78"/>
+                <a:ea typeface="Amiri" pitchFamily="2" charset="-78"/>
                 <a:cs typeface="Amiri" pitchFamily="2" charset="-78"/>
               </a:rPr>
               <a:t>الْجَامِعَةُ</a:t>
@@ -14501,6 +14569,7 @@
                   <a:srgbClr val="1B3B6F"/>
                 </a:solidFill>
                 <a:latin typeface="Amiri" pitchFamily="2" charset="-78"/>
+                <a:ea typeface="Amiri" pitchFamily="2" charset="-78"/>
                 <a:cs typeface="Amiri" pitchFamily="2" charset="-78"/>
               </a:rPr>
               <a:t>الْمُهَنْدِسُونَ</a:t>
@@ -14573,6 +14642,7 @@
                   <a:srgbClr val="1B3B6F"/>
                 </a:solidFill>
                 <a:latin typeface="Amiri" pitchFamily="2" charset="-78"/>
+                <a:ea typeface="Amiri" pitchFamily="2" charset="-78"/>
                 <a:cs typeface="Amiri" pitchFamily="2" charset="-78"/>
               </a:rPr>
               <a:t>الْبَابُ</a:t>
@@ -14645,6 +14715,7 @@
                   <a:srgbClr val="1B3B6F"/>
                 </a:solidFill>
                 <a:latin typeface="Amiri" pitchFamily="2" charset="-78"/>
+                <a:ea typeface="Amiri" pitchFamily="2" charset="-78"/>
                 <a:cs typeface="Amiri" pitchFamily="2" charset="-78"/>
               </a:rPr>
               <a:t>السَّيَّارَاتُ</a:t>
@@ -14717,6 +14788,7 @@
                   <a:srgbClr val="1B3B6F"/>
                 </a:solidFill>
                 <a:latin typeface="Amiri" pitchFamily="2" charset="-78"/>
+                <a:ea typeface="Amiri" pitchFamily="2" charset="-78"/>
                 <a:cs typeface="Amiri" pitchFamily="2" charset="-78"/>
               </a:rPr>
               <a:t>الْأَصْدِقَاءُ</a:t>
@@ -14789,6 +14861,7 @@
                   <a:srgbClr val="1B3B6F"/>
                 </a:solidFill>
                 <a:latin typeface="Amiri" pitchFamily="2" charset="-78"/>
+                <a:ea typeface="Amiri" pitchFamily="2" charset="-78"/>
                 <a:cs typeface="Amiri" pitchFamily="2" charset="-78"/>
               </a:rPr>
               <a:t>الْفِيلْمُ</a:t>
@@ -14861,6 +14934,7 @@
                   <a:srgbClr val="1B3B6F"/>
                 </a:solidFill>
                 <a:latin typeface="Amiri" pitchFamily="2" charset="-78"/>
+                <a:ea typeface="Amiri" pitchFamily="2" charset="-78"/>
                 <a:cs typeface="Amiri" pitchFamily="2" charset="-78"/>
               </a:rPr>
               <a:t>الْقِصَّةُ</a:t>
@@ -15270,6 +15344,7 @@
                   <a:srgbClr val="D4AF37"/>
                 </a:solidFill>
                 <a:latin typeface="Amiri" pitchFamily="2" charset="-78"/>
+                <a:ea typeface="Amiri" pitchFamily="2" charset="-78"/>
                 <a:cs typeface="Amiri" pitchFamily="2" charset="-78"/>
               </a:rPr>
               <a:t>م</a:t>
@@ -15590,6 +15665,7 @@
                   <a:srgbClr val="8A6D1E"/>
                 </a:solidFill>
                 <a:latin typeface="Amiri" pitchFamily="2" charset="-78"/>
+                <a:ea typeface="Amiri" pitchFamily="2" charset="-78"/>
                 <a:cs typeface="Amiri" pitchFamily="2" charset="-78"/>
               </a:rPr>
               <a:t>الإِجَابَاتُ</a:t>
@@ -15785,6 +15861,7 @@
                   <a:srgbClr val="1B3B6F"/>
                 </a:solidFill>
                 <a:latin typeface="Amiri" pitchFamily="2" charset="-78"/>
+                <a:ea typeface="Amiri" pitchFamily="2" charset="-78"/>
                 <a:cs typeface="Amiri" pitchFamily="2" charset="-78"/>
               </a:rPr>
               <a:t>الْمُدِيرُ</a:t>
@@ -15850,6 +15927,7 @@
                   <a:srgbClr val="1B3B6F"/>
                 </a:solidFill>
                 <a:latin typeface="Amiri" pitchFamily="2" charset="-78"/>
+                <a:ea typeface="Amiri" pitchFamily="2" charset="-78"/>
                 <a:cs typeface="Amiri" pitchFamily="2" charset="-78"/>
               </a:rPr>
               <a:t>الْبَابُ</a:t>
@@ -15915,6 +15993,7 @@
                   <a:srgbClr val="1B3B6F"/>
                 </a:solidFill>
                 <a:latin typeface="Amiri" pitchFamily="2" charset="-78"/>
+                <a:ea typeface="Amiri" pitchFamily="2" charset="-78"/>
                 <a:cs typeface="Amiri" pitchFamily="2" charset="-78"/>
               </a:rPr>
               <a:t>الْفِيلْمُ</a:t>
@@ -16072,6 +16151,7 @@
                   <a:srgbClr val="1B3B6F"/>
                 </a:solidFill>
                 <a:latin typeface="Amiri" pitchFamily="2" charset="-78"/>
+                <a:ea typeface="Amiri" pitchFamily="2" charset="-78"/>
                 <a:cs typeface="Amiri" pitchFamily="2" charset="-78"/>
               </a:rPr>
               <a:t>الْجَامِعَةُ</a:t>
@@ -16137,6 +16217,7 @@
                   <a:srgbClr val="1B3B6F"/>
                 </a:solidFill>
                 <a:latin typeface="Amiri" pitchFamily="2" charset="-78"/>
+                <a:ea typeface="Amiri" pitchFamily="2" charset="-78"/>
                 <a:cs typeface="Amiri" pitchFamily="2" charset="-78"/>
               </a:rPr>
               <a:t>السَّيَّارَاتُ</a:t>
@@ -16202,6 +16283,7 @@
                   <a:srgbClr val="1B3B6F"/>
                 </a:solidFill>
                 <a:latin typeface="Amiri" pitchFamily="2" charset="-78"/>
+                <a:ea typeface="Amiri" pitchFamily="2" charset="-78"/>
                 <a:cs typeface="Amiri" pitchFamily="2" charset="-78"/>
               </a:rPr>
               <a:t>الْقِصَّةُ</a:t>
@@ -16359,6 +16441,7 @@
                   <a:srgbClr val="1B3B6F"/>
                 </a:solidFill>
                 <a:latin typeface="Amiri" pitchFamily="2" charset="-78"/>
+                <a:ea typeface="Amiri" pitchFamily="2" charset="-78"/>
                 <a:cs typeface="Amiri" pitchFamily="2" charset="-78"/>
               </a:rPr>
               <a:t>الْمُهَنْدِسُونَ</a:t>
@@ -16424,6 +16507,7 @@
                   <a:srgbClr val="1B3B6F"/>
                 </a:solidFill>
                 <a:latin typeface="Amiri" pitchFamily="2" charset="-78"/>
+                <a:ea typeface="Amiri" pitchFamily="2" charset="-78"/>
                 <a:cs typeface="Amiri" pitchFamily="2" charset="-78"/>
               </a:rPr>
               <a:t>الْأَصْدِقَاءُ</a:t>
@@ -16557,6 +16641,7 @@
                   <a:srgbClr val="D4AF37"/>
                 </a:solidFill>
                 <a:latin typeface="Amiri" pitchFamily="2" charset="-78"/>
+                <a:ea typeface="Amiri" pitchFamily="2" charset="-78"/>
                 <a:cs typeface="Amiri" pitchFamily="2" charset="-78"/>
               </a:rPr>
               <a:t>م</a:t>
@@ -16877,6 +16962,7 @@
                   <a:srgbClr val="8A6D1E"/>
                 </a:solidFill>
                 <a:latin typeface="Amiri" pitchFamily="2" charset="-78"/>
+                <a:ea typeface="Amiri" pitchFamily="2" charset="-78"/>
                 <a:cs typeface="Amiri" pitchFamily="2" charset="-78"/>
               </a:rPr>
               <a:t>اجْمَعِ الْجُمْلَتَيْنِ</a:t>
@@ -17081,6 +17167,7 @@
                   <a:srgbClr val="1B3B6F"/>
                 </a:solidFill>
                 <a:latin typeface="Amiri" pitchFamily="2" charset="-78"/>
+                <a:ea typeface="Amiri" pitchFamily="2" charset="-78"/>
                 <a:cs typeface="Amiri" pitchFamily="2" charset="-78"/>
               </a:rPr>
               <a:t>هَذَا الطَّالِبُ الَّذِي فَازَ.</a:t>
@@ -17119,6 +17206,7 @@
                   <a:srgbClr val="1B3B6F"/>
                 </a:solidFill>
                 <a:latin typeface="Amiri" pitchFamily="2" charset="-78"/>
+                <a:ea typeface="Amiri" pitchFamily="2" charset="-78"/>
                 <a:cs typeface="Amiri" pitchFamily="2" charset="-78"/>
               </a:rPr>
               <a:t>هَذَا الطَّالِبُ. الطَّالِبُ فَازَ.</a:t>
@@ -17249,6 +17337,7 @@
                   <a:srgbClr val="1B3B6F"/>
                 </a:solidFill>
                 <a:latin typeface="Amiri" pitchFamily="2" charset="-78"/>
+                <a:ea typeface="Amiri" pitchFamily="2" charset="-78"/>
                 <a:cs typeface="Amiri" pitchFamily="2" charset="-78"/>
               </a:rPr>
               <a:t>أُحِبُّ الْمُعَلِّمَةَ الَّتِي تُسَاعِدُنَا.</a:t>
@@ -17287,6 +17376,7 @@
                   <a:srgbClr val="1B3B6F"/>
                 </a:solidFill>
                 <a:latin typeface="Amiri" pitchFamily="2" charset="-78"/>
+                <a:ea typeface="Amiri" pitchFamily="2" charset="-78"/>
                 <a:cs typeface="Amiri" pitchFamily="2" charset="-78"/>
               </a:rPr>
               <a:t>أُحِبُّ الْمُعَلِّمَةَ. الْمُعَلِّمَةُ تُسَاعِدُنَا.</a:t>
@@ -17417,6 +17507,7 @@
                   <a:srgbClr val="1B3B6F"/>
                 </a:solidFill>
                 <a:latin typeface="Amiri" pitchFamily="2" charset="-78"/>
+                <a:ea typeface="Amiri" pitchFamily="2" charset="-78"/>
                 <a:cs typeface="Amiri" pitchFamily="2" charset="-78"/>
               </a:rPr>
               <a:t>رَأَيْتُ الطُّلَّابَ الَّذِينَ حَضَرُوا.</a:t>
@@ -17455,6 +17546,7 @@
                   <a:srgbClr val="1B3B6F"/>
                 </a:solidFill>
                 <a:latin typeface="Amiri" pitchFamily="2" charset="-78"/>
+                <a:ea typeface="Amiri" pitchFamily="2" charset="-78"/>
                 <a:cs typeface="Amiri" pitchFamily="2" charset="-78"/>
               </a:rPr>
               <a:t>رَأَيْتُ الطُّلَّابَ. الطُّلَّابُ حَضَرُوا.</a:t>
@@ -17520,6 +17612,7 @@
                   <a:srgbClr val="1B3B6F"/>
                 </a:solidFill>
                 <a:latin typeface="Amiri" pitchFamily="2" charset="-78"/>
+                <a:ea typeface="Amiri" pitchFamily="2" charset="-78"/>
                 <a:cs typeface="Amiri" pitchFamily="2" charset="-78"/>
               </a:rPr>
               <a:t>هَذِهِ الْقِصَّةُ الَّتِي كَتَبْتُهَا.</a:t>
@@ -17558,6 +17651,7 @@
                   <a:srgbClr val="1B3B6F"/>
                 </a:solidFill>
                 <a:latin typeface="Amiri" pitchFamily="2" charset="-78"/>
+                <a:ea typeface="Amiri" pitchFamily="2" charset="-78"/>
                 <a:cs typeface="Amiri" pitchFamily="2" charset="-78"/>
               </a:rPr>
               <a:t>هَذِهِ الْقِصَّةُ. كَتَبْتُ الْقِصَّةَ.</a:t>
@@ -17729,6 +17823,7 @@
                   <a:srgbClr val="D4AF37"/>
                 </a:solidFill>
                 <a:latin typeface="Amiri" pitchFamily="2" charset="-78"/>
+                <a:ea typeface="Amiri" pitchFamily="2" charset="-78"/>
                 <a:cs typeface="Amiri" pitchFamily="2" charset="-78"/>
               </a:rPr>
               <a:t>م</a:t>
@@ -18049,6 +18144,7 @@
                   <a:srgbClr val="8A6D1E"/>
                 </a:solidFill>
                 <a:latin typeface="Amiri" pitchFamily="2" charset="-78"/>
+                <a:ea typeface="Amiri" pitchFamily="2" charset="-78"/>
                 <a:cs typeface="Amiri" pitchFamily="2" charset="-78"/>
               </a:rPr>
               <a:t>صَحِّحِ الخَطَأَ</a:t>
@@ -18222,6 +18318,7 @@
                   <a:srgbClr val="B83227"/>
                 </a:solidFill>
                 <a:latin typeface="Amiri" pitchFamily="2" charset="-78"/>
+                <a:ea typeface="Amiri" pitchFamily="2" charset="-78"/>
                 <a:cs typeface="Amiri" pitchFamily="2" charset="-78"/>
               </a:rPr>
               <a:t>الطَّالِبَةُ الَّذِي فَازَتْ</a:t>
@@ -18395,6 +18492,7 @@
                   <a:srgbClr val="B83227"/>
                 </a:solidFill>
                 <a:latin typeface="Amiri" pitchFamily="2" charset="-78"/>
+                <a:ea typeface="Amiri" pitchFamily="2" charset="-78"/>
                 <a:cs typeface="Amiri" pitchFamily="2" charset="-78"/>
               </a:rPr>
               <a:t>الطُّلَّابُ الَّذِي حَضَرُوا</a:t>
@@ -18568,6 +18666,7 @@
                   <a:srgbClr val="B83227"/>
                 </a:solidFill>
                 <a:latin typeface="Amiri" pitchFamily="2" charset="-78"/>
+                <a:ea typeface="Amiri" pitchFamily="2" charset="-78"/>
                 <a:cs typeface="Amiri" pitchFamily="2" charset="-78"/>
               </a:rPr>
               <a:t>الْكِتَابُ الَّذِي قَرَأْتُ</a:t>
@@ -18739,6 +18838,7 @@
                   <a:srgbClr val="D4AF37"/>
                 </a:solidFill>
                 <a:latin typeface="Amiri" pitchFamily="2" charset="-78"/>
+                <a:ea typeface="Amiri" pitchFamily="2" charset="-78"/>
                 <a:cs typeface="Amiri" pitchFamily="2" charset="-78"/>
               </a:rPr>
               <a:t>م</a:t>
@@ -19059,6 +19159,7 @@
                   <a:srgbClr val="8A6D1E"/>
                 </a:solidFill>
                 <a:latin typeface="Amiri" pitchFamily="2" charset="-78"/>
+                <a:ea typeface="Amiri" pitchFamily="2" charset="-78"/>
                 <a:cs typeface="Amiri" pitchFamily="2" charset="-78"/>
               </a:rPr>
               <a:t>التَّصْحِيحُ وَالسَّبَبُ</a:t>
@@ -19169,6 +19270,7 @@
                   <a:srgbClr val="B83227"/>
                 </a:solidFill>
                 <a:latin typeface="Amiri" pitchFamily="2" charset="-78"/>
+                <a:ea typeface="Amiri" pitchFamily="2" charset="-78"/>
                 <a:cs typeface="Amiri" pitchFamily="2" charset="-78"/>
               </a:rPr>
               <a:t>الطَّالِبَةُ الَّذِي فَازَتْ</a:t>
@@ -19268,6 +19370,7 @@
                   <a:srgbClr val="1E6B52"/>
                 </a:solidFill>
                 <a:latin typeface="Amiri" pitchFamily="2" charset="-78"/>
+                <a:ea typeface="Amiri" pitchFamily="2" charset="-78"/>
                 <a:cs typeface="Amiri" pitchFamily="2" charset="-78"/>
               </a:rPr>
               <a:t>الطَّالِبَةُ الَّتِي فَازَتْ</a:t>
@@ -19378,6 +19481,7 @@
                   <a:srgbClr val="B83227"/>
                 </a:solidFill>
                 <a:latin typeface="Amiri" pitchFamily="2" charset="-78"/>
+                <a:ea typeface="Amiri" pitchFamily="2" charset="-78"/>
                 <a:cs typeface="Amiri" pitchFamily="2" charset="-78"/>
               </a:rPr>
               <a:t>الطُّلَّابُ الَّذِي حَضَرُوا</a:t>
@@ -19477,6 +19581,7 @@
                   <a:srgbClr val="1E6B52"/>
                 </a:solidFill>
                 <a:latin typeface="Amiri" pitchFamily="2" charset="-78"/>
+                <a:ea typeface="Amiri" pitchFamily="2" charset="-78"/>
                 <a:cs typeface="Amiri" pitchFamily="2" charset="-78"/>
               </a:rPr>
               <a:t>الطُّلَّابُ الَّذِينَ حَضَرُوا</a:t>
@@ -19587,6 +19692,7 @@
                   <a:srgbClr val="B83227"/>
                 </a:solidFill>
                 <a:latin typeface="Amiri" pitchFamily="2" charset="-78"/>
+                <a:ea typeface="Amiri" pitchFamily="2" charset="-78"/>
                 <a:cs typeface="Amiri" pitchFamily="2" charset="-78"/>
               </a:rPr>
               <a:t>الْكِتَابُ الَّذِي قَرَأْتُ</a:t>
@@ -19686,6 +19792,7 @@
                   <a:srgbClr val="1E6B52"/>
                 </a:solidFill>
                 <a:latin typeface="Amiri" pitchFamily="2" charset="-78"/>
+                <a:ea typeface="Amiri" pitchFamily="2" charset="-78"/>
                 <a:cs typeface="Amiri" pitchFamily="2" charset="-78"/>
               </a:rPr>
               <a:t>الْكِتَابُ الَّذِي قَرَأْتُهُ</a:t>
@@ -19857,6 +19964,7 @@
                   <a:srgbClr val="D4AF37"/>
                 </a:solidFill>
                 <a:latin typeface="Amiri" pitchFamily="2" charset="-78"/>
+                <a:ea typeface="Amiri" pitchFamily="2" charset="-78"/>
                 <a:cs typeface="Amiri" pitchFamily="2" charset="-78"/>
               </a:rPr>
               <a:t>م</a:t>
@@ -20177,6 +20285,7 @@
                   <a:srgbClr val="8A6D1E"/>
                 </a:solidFill>
                 <a:latin typeface="Amiri" pitchFamily="2" charset="-78"/>
+                <a:ea typeface="Amiri" pitchFamily="2" charset="-78"/>
                 <a:cs typeface="Amiri" pitchFamily="2" charset="-78"/>
               </a:rPr>
               <a:t>آدَابُ الصَّفِّ</a:t>
@@ -21708,6 +21817,7 @@
                   <a:srgbClr val="D4AF37"/>
                 </a:solidFill>
                 <a:latin typeface="Amiri" pitchFamily="2" charset="-78"/>
+                <a:ea typeface="Amiri" pitchFamily="2" charset="-78"/>
                 <a:cs typeface="Amiri" pitchFamily="2" charset="-78"/>
               </a:rPr>
               <a:t>م</a:t>
@@ -22093,6 +22203,7 @@
                   <a:srgbClr val="8A6D1E"/>
                 </a:solidFill>
                 <a:latin typeface="Amiri" pitchFamily="2" charset="-78"/>
+                <a:ea typeface="Amiri" pitchFamily="2" charset="-78"/>
                 <a:cs typeface="Amiri" pitchFamily="2" charset="-78"/>
               </a:rPr>
               <a:t>تَدْرِيبٌ إِضَافِيٌّ</a:t>
@@ -22367,6 +22478,7 @@
                   <a:srgbClr val="1F2A37"/>
                 </a:solidFill>
                 <a:latin typeface="Amiri" pitchFamily="2" charset="-78"/>
+                <a:ea typeface="Amiri" pitchFamily="2" charset="-78"/>
                 <a:cs typeface="Amiri" pitchFamily="2" charset="-78"/>
               </a:rPr>
               <a:t>الطَّالِبَانِ الَّذِينَ نَجَحُوا</a:t>
@@ -22468,6 +22580,7 @@
                   <a:srgbClr val="1F2A37"/>
                 </a:solidFill>
                 <a:latin typeface="Amiri" pitchFamily="2" charset="-78"/>
+                <a:ea typeface="Amiri" pitchFamily="2" charset="-78"/>
                 <a:cs typeface="Amiri" pitchFamily="2" charset="-78"/>
               </a:rPr>
               <a:t>الطَّالِبَانِ الَّذِي نَجَحَ</a:t>
@@ -22569,6 +22682,7 @@
                   <a:srgbClr val="1F2A37"/>
                 </a:solidFill>
                 <a:latin typeface="Amiri" pitchFamily="2" charset="-78"/>
+                <a:ea typeface="Amiri" pitchFamily="2" charset="-78"/>
                 <a:cs typeface="Amiri" pitchFamily="2" charset="-78"/>
               </a:rPr>
               <a:t>الطَّالِبَانِ اللَّذَانِ نَجَحَا</a:t>
@@ -22805,6 +22919,7 @@
                   <a:srgbClr val="1F2A37"/>
                 </a:solidFill>
                 <a:latin typeface="Amiri" pitchFamily="2" charset="-78"/>
+                <a:ea typeface="Amiri" pitchFamily="2" charset="-78"/>
                 <a:cs typeface="Amiri" pitchFamily="2" charset="-78"/>
               </a:rPr>
               <a:t>الْبَنَاتُ الَّذِينَ حَضَرُوا</a:t>
@@ -22906,6 +23021,7 @@
                   <a:srgbClr val="1F2A37"/>
                 </a:solidFill>
                 <a:latin typeface="Amiri" pitchFamily="2" charset="-78"/>
+                <a:ea typeface="Amiri" pitchFamily="2" charset="-78"/>
                 <a:cs typeface="Amiri" pitchFamily="2" charset="-78"/>
               </a:rPr>
               <a:t>الْبَنَاتُ اللَّاتِي حَضَرْنَ</a:t>
@@ -23007,6 +23123,7 @@
                   <a:srgbClr val="1F2A37"/>
                 </a:solidFill>
                 <a:latin typeface="Amiri" pitchFamily="2" charset="-78"/>
+                <a:ea typeface="Amiri" pitchFamily="2" charset="-78"/>
                 <a:cs typeface="Amiri" pitchFamily="2" charset="-78"/>
               </a:rPr>
               <a:t>الْبَنَاتُ الَّتِي حَضَرَتْ</a:t>
@@ -23243,6 +23360,7 @@
                   <a:srgbClr val="1F2A37"/>
                 </a:solidFill>
                 <a:latin typeface="Amiri" pitchFamily="2" charset="-78"/>
+                <a:ea typeface="Amiri" pitchFamily="2" charset="-78"/>
                 <a:cs typeface="Amiri" pitchFamily="2" charset="-78"/>
               </a:rPr>
               <a:t>الْبَيْتُ الَّذِي أَسْكُنُ</a:t>
@@ -23344,6 +23462,7 @@
                   <a:srgbClr val="1F2A37"/>
                 </a:solidFill>
                 <a:latin typeface="Amiri" pitchFamily="2" charset="-78"/>
+                <a:ea typeface="Amiri" pitchFamily="2" charset="-78"/>
                 <a:cs typeface="Amiri" pitchFamily="2" charset="-78"/>
               </a:rPr>
               <a:t>الْبَيْتُ الَّذِي أَسْكُنُ فِيهِ</a:t>
@@ -23445,6 +23564,7 @@
                   <a:srgbClr val="1F2A37"/>
                 </a:solidFill>
                 <a:latin typeface="Amiri" pitchFamily="2" charset="-78"/>
+                <a:ea typeface="Amiri" pitchFamily="2" charset="-78"/>
                 <a:cs typeface="Amiri" pitchFamily="2" charset="-78"/>
               </a:rPr>
               <a:t>الْبَيْتُ الَّتِي أَسْكُنُ فِيهَا</a:t>
@@ -23681,6 +23801,7 @@
                   <a:srgbClr val="1F2A37"/>
                 </a:solidFill>
                 <a:latin typeface="Amiri" pitchFamily="2" charset="-78"/>
+                <a:ea typeface="Amiri" pitchFamily="2" charset="-78"/>
                 <a:cs typeface="Amiri" pitchFamily="2" charset="-78"/>
               </a:rPr>
               <a:t>جَاءَ طَالِبٌ الَّذِي فَازَ.</a:t>
@@ -23782,6 +23903,7 @@
                   <a:srgbClr val="1F2A37"/>
                 </a:solidFill>
                 <a:latin typeface="Amiri" pitchFamily="2" charset="-78"/>
+                <a:ea typeface="Amiri" pitchFamily="2" charset="-78"/>
                 <a:cs typeface="Amiri" pitchFamily="2" charset="-78"/>
               </a:rPr>
               <a:t>جَاءَ الطَّالِبُ فَازَ الَّذِي.</a:t>
@@ -23883,6 +24005,7 @@
                   <a:srgbClr val="1F2A37"/>
                 </a:solidFill>
                 <a:latin typeface="Amiri" pitchFamily="2" charset="-78"/>
+                <a:ea typeface="Amiri" pitchFamily="2" charset="-78"/>
                 <a:cs typeface="Amiri" pitchFamily="2" charset="-78"/>
               </a:rPr>
               <a:t>جَاءَ طَالِبٌ فَازَ فِي الْمُسَابَقَةِ.</a:t>
@@ -24016,6 +24139,7 @@
                   <a:srgbClr val="D4AF37"/>
                 </a:solidFill>
                 <a:latin typeface="Amiri" pitchFamily="2" charset="-78"/>
+                <a:ea typeface="Amiri" pitchFamily="2" charset="-78"/>
                 <a:cs typeface="Amiri" pitchFamily="2" charset="-78"/>
               </a:rPr>
               <a:t>م</a:t>
@@ -24401,6 +24525,7 @@
                   <a:srgbClr val="8A6D1E"/>
                 </a:solidFill>
                 <a:latin typeface="Amiri" pitchFamily="2" charset="-78"/>
+                <a:ea typeface="Amiri" pitchFamily="2" charset="-78"/>
                 <a:cs typeface="Amiri" pitchFamily="2" charset="-78"/>
               </a:rPr>
               <a:t>الإِجَابَاتُ وَالتَّعْلِيلُ</a:t>
@@ -24675,6 +24800,7 @@
                   <a:srgbClr val="9AA1AB"/>
                 </a:solidFill>
                 <a:latin typeface="Amiri" pitchFamily="2" charset="-78"/>
+                <a:ea typeface="Amiri" pitchFamily="2" charset="-78"/>
                 <a:cs typeface="Amiri" pitchFamily="2" charset="-78"/>
               </a:rPr>
               <a:t>الطَّالِبَانِ الَّذِينَ نَجَحُوا</a:t>
@@ -24776,6 +24902,7 @@
                   <a:srgbClr val="9AA1AB"/>
                 </a:solidFill>
                 <a:latin typeface="Amiri" pitchFamily="2" charset="-78"/>
+                <a:ea typeface="Amiri" pitchFamily="2" charset="-78"/>
                 <a:cs typeface="Amiri" pitchFamily="2" charset="-78"/>
               </a:rPr>
               <a:t>الطَّالِبَانِ الَّذِي نَجَحَ</a:t>
@@ -24904,6 +25031,7 @@
                   <a:srgbClr val="1F2A37"/>
                 </a:solidFill>
                 <a:latin typeface="Amiri" pitchFamily="2" charset="-78"/>
+                <a:ea typeface="Amiri" pitchFamily="2" charset="-78"/>
                 <a:cs typeface="Amiri" pitchFamily="2" charset="-78"/>
               </a:rPr>
               <a:t>الطَّالِبَانِ اللَّذَانِ نَجَحَا</a:t>
@@ -25178,6 +25306,7 @@
                   <a:srgbClr val="9AA1AB"/>
                 </a:solidFill>
                 <a:latin typeface="Amiri" pitchFamily="2" charset="-78"/>
+                <a:ea typeface="Amiri" pitchFamily="2" charset="-78"/>
                 <a:cs typeface="Amiri" pitchFamily="2" charset="-78"/>
               </a:rPr>
               <a:t>الْبَنَاتُ الَّذِينَ حَضَرُوا</a:t>
@@ -25306,6 +25435,7 @@
                   <a:srgbClr val="1F2A37"/>
                 </a:solidFill>
                 <a:latin typeface="Amiri" pitchFamily="2" charset="-78"/>
+                <a:ea typeface="Amiri" pitchFamily="2" charset="-78"/>
                 <a:cs typeface="Amiri" pitchFamily="2" charset="-78"/>
               </a:rPr>
               <a:t>الْبَنَاتُ اللَّاتِي حَضَرْنَ</a:t>
@@ -25407,6 +25537,7 @@
                   <a:srgbClr val="9AA1AB"/>
                 </a:solidFill>
                 <a:latin typeface="Amiri" pitchFamily="2" charset="-78"/>
+                <a:ea typeface="Amiri" pitchFamily="2" charset="-78"/>
                 <a:cs typeface="Amiri" pitchFamily="2" charset="-78"/>
               </a:rPr>
               <a:t>الْبَنَاتُ الَّتِي حَضَرَتْ</a:t>
@@ -25681,6 +25812,7 @@
                   <a:srgbClr val="9AA1AB"/>
                 </a:solidFill>
                 <a:latin typeface="Amiri" pitchFamily="2" charset="-78"/>
+                <a:ea typeface="Amiri" pitchFamily="2" charset="-78"/>
                 <a:cs typeface="Amiri" pitchFamily="2" charset="-78"/>
               </a:rPr>
               <a:t>الْبَيْتُ الَّذِي أَسْكُنُ</a:t>
@@ -25809,6 +25941,7 @@
                   <a:srgbClr val="1F2A37"/>
                 </a:solidFill>
                 <a:latin typeface="Amiri" pitchFamily="2" charset="-78"/>
+                <a:ea typeface="Amiri" pitchFamily="2" charset="-78"/>
                 <a:cs typeface="Amiri" pitchFamily="2" charset="-78"/>
               </a:rPr>
               <a:t>الْبَيْتُ الَّذِي أَسْكُنُ فِيهِ</a:t>
@@ -25910,6 +26043,7 @@
                   <a:srgbClr val="9AA1AB"/>
                 </a:solidFill>
                 <a:latin typeface="Amiri" pitchFamily="2" charset="-78"/>
+                <a:ea typeface="Amiri" pitchFamily="2" charset="-78"/>
                 <a:cs typeface="Amiri" pitchFamily="2" charset="-78"/>
               </a:rPr>
               <a:t>الْبَيْتُ الَّتِي أَسْكُنُ فِيهَا</a:t>
@@ -26184,6 +26318,7 @@
                   <a:srgbClr val="9AA1AB"/>
                 </a:solidFill>
                 <a:latin typeface="Amiri" pitchFamily="2" charset="-78"/>
+                <a:ea typeface="Amiri" pitchFamily="2" charset="-78"/>
                 <a:cs typeface="Amiri" pitchFamily="2" charset="-78"/>
               </a:rPr>
               <a:t>جَاءَ طَالِبٌ الَّذِي فَازَ.</a:t>
@@ -26285,6 +26420,7 @@
                   <a:srgbClr val="9AA1AB"/>
                 </a:solidFill>
                 <a:latin typeface="Amiri" pitchFamily="2" charset="-78"/>
+                <a:ea typeface="Amiri" pitchFamily="2" charset="-78"/>
                 <a:cs typeface="Amiri" pitchFamily="2" charset="-78"/>
               </a:rPr>
               <a:t>جَاءَ الطَّالِبُ فَازَ الَّذِي.</a:t>
@@ -26413,6 +26549,7 @@
                   <a:srgbClr val="1F2A37"/>
                 </a:solidFill>
                 <a:latin typeface="Amiri" pitchFamily="2" charset="-78"/>
+                <a:ea typeface="Amiri" pitchFamily="2" charset="-78"/>
                 <a:cs typeface="Amiri" pitchFamily="2" charset="-78"/>
               </a:rPr>
               <a:t>جَاءَ طَالِبٌ فَازَ فِي الْمُسَابَقَةِ.</a:t>
@@ -26584,6 +26721,7 @@
                   <a:srgbClr val="D4AF37"/>
                 </a:solidFill>
                 <a:latin typeface="Amiri" pitchFamily="2" charset="-78"/>
+                <a:ea typeface="Amiri" pitchFamily="2" charset="-78"/>
                 <a:cs typeface="Amiri" pitchFamily="2" charset="-78"/>
               </a:rPr>
               <a:t>م</a:t>
@@ -26904,6 +27042,7 @@
                   <a:srgbClr val="8A6D1E"/>
                 </a:solidFill>
                 <a:latin typeface="Amiri" pitchFamily="2" charset="-78"/>
+                <a:ea typeface="Amiri" pitchFamily="2" charset="-78"/>
                 <a:cs typeface="Amiri" pitchFamily="2" charset="-78"/>
               </a:rPr>
               <a:t>اِقْرَأْ وَلَاحِظْ</a:t>
@@ -27017,6 +27156,7 @@
                   <a:srgbClr val="1F2A37"/>
                 </a:solidFill>
                 <a:latin typeface="Amiri" pitchFamily="2" charset="-78"/>
+                <a:ea typeface="Amiri" pitchFamily="2" charset="-78"/>
                 <a:cs typeface="Amiri" pitchFamily="2" charset="-78"/>
               </a:rPr>
               <a:t>فِي مَدْرَسَتِنَا طُلَّابٌ كَثِيرُونَ. الطَّالِبُ الَّذِي فَازَ فِي الْمُسَابَقَةِ اسْمُهُ سَامِرٌ. وَالطَّالِبَةُ الَّتِي كَتَبَتِ الْقِصَّةَ اسْمُهَا لَيْلَى. هَؤُلَاءِ هُمُ الطُّلَّابُ الَّذِينَ يُسَاعِدُونَ زُمَلَاءَهُمْ، وَتِلْكَ هِيَ الْمُعَلِّمَةُ الَّتِي تُشَجِّعُهُمْ دَائِمًا. أُحِبُّ الْمَكْتَبَةَ الَّتِي أَقْرَأُ فِيهَا، وَهَذَا هُوَ الْكِتَابُ الَّذِي قَرَأْتُهُ فِي الْأُسْبُوعِ الْمَاضِي.</a:t>
@@ -27127,6 +27267,7 @@
                   <a:srgbClr val="1B3B6F"/>
                 </a:solidFill>
                 <a:latin typeface="Amiri" pitchFamily="2" charset="-78"/>
+                <a:ea typeface="Amiri" pitchFamily="2" charset="-78"/>
                 <a:cs typeface="Amiri" pitchFamily="2" charset="-78"/>
               </a:rPr>
               <a:t>الْمُسَابَقَةِ</a:t>
@@ -27203,6 +27344,7 @@
                   <a:srgbClr val="1B3B6F"/>
                 </a:solidFill>
                 <a:latin typeface="Amiri" pitchFamily="2" charset="-78"/>
+                <a:ea typeface="Amiri" pitchFamily="2" charset="-78"/>
                 <a:cs typeface="Amiri" pitchFamily="2" charset="-78"/>
               </a:rPr>
               <a:t>زُمَلَاءَهُمْ</a:t>
@@ -27279,6 +27421,7 @@
                   <a:srgbClr val="1B3B6F"/>
                 </a:solidFill>
                 <a:latin typeface="Amiri" pitchFamily="2" charset="-78"/>
+                <a:ea typeface="Amiri" pitchFamily="2" charset="-78"/>
                 <a:cs typeface="Amiri" pitchFamily="2" charset="-78"/>
               </a:rPr>
               <a:t>تُشَجِّعُهُمْ</a:t>
@@ -27355,6 +27498,7 @@
                   <a:srgbClr val="1B3B6F"/>
                 </a:solidFill>
                 <a:latin typeface="Amiri" pitchFamily="2" charset="-78"/>
+                <a:ea typeface="Amiri" pitchFamily="2" charset="-78"/>
                 <a:cs typeface="Amiri" pitchFamily="2" charset="-78"/>
               </a:rPr>
               <a:t>دَائِمًا</a:t>
@@ -27431,6 +27575,7 @@
                   <a:srgbClr val="1B3B6F"/>
                 </a:solidFill>
                 <a:latin typeface="Amiri" pitchFamily="2" charset="-78"/>
+                <a:ea typeface="Amiri" pitchFamily="2" charset="-78"/>
                 <a:cs typeface="Amiri" pitchFamily="2" charset="-78"/>
               </a:rPr>
               <a:t>فِيهَا</a:t>
@@ -27602,6 +27747,7 @@
                   <a:srgbClr val="D4AF37"/>
                 </a:solidFill>
                 <a:latin typeface="Amiri" pitchFamily="2" charset="-78"/>
+                <a:ea typeface="Amiri" pitchFamily="2" charset="-78"/>
                 <a:cs typeface="Amiri" pitchFamily="2" charset="-78"/>
               </a:rPr>
               <a:t>م</a:t>
@@ -27922,6 +28068,7 @@
                   <a:srgbClr val="8A6D1E"/>
                 </a:solidFill>
                 <a:latin typeface="Amiri" pitchFamily="2" charset="-78"/>
+                <a:ea typeface="Amiri" pitchFamily="2" charset="-78"/>
                 <a:cs typeface="Amiri" pitchFamily="2" charset="-78"/>
               </a:rPr>
               <a:t>أَسْئِلَةُ القِرَاءَةِ</a:t>
@@ -28984,6 +29131,7 @@
                   <a:srgbClr val="1B3B6F"/>
                 </a:solidFill>
                 <a:latin typeface="Amiri" pitchFamily="2" charset="-78"/>
+                <a:ea typeface="Amiri" pitchFamily="2" charset="-78"/>
                 <a:cs typeface="Amiri" pitchFamily="2" charset="-78"/>
               </a:rPr>
               <a:t>الَّذِينَ</a:t>
@@ -29448,6 +29596,7 @@
                   <a:srgbClr val="1B3B6F"/>
                 </a:solidFill>
                 <a:latin typeface="Amiri" pitchFamily="2" charset="-78"/>
+                <a:ea typeface="Amiri" pitchFamily="2" charset="-78"/>
                 <a:cs typeface="Amiri" pitchFamily="2" charset="-78"/>
               </a:rPr>
               <a:t>فِيهَا</a:t>
@@ -30039,6 +30188,7 @@
                   <a:srgbClr val="D4AF37"/>
                 </a:solidFill>
                 <a:latin typeface="Amiri" pitchFamily="2" charset="-78"/>
+                <a:ea typeface="Amiri" pitchFamily="2" charset="-78"/>
                 <a:cs typeface="Amiri" pitchFamily="2" charset="-78"/>
               </a:rPr>
               <a:t>م</a:t>
@@ -30359,6 +30509,7 @@
                   <a:srgbClr val="8A6D1E"/>
                 </a:solidFill>
                 <a:latin typeface="Amiri" pitchFamily="2" charset="-78"/>
+                <a:ea typeface="Amiri" pitchFamily="2" charset="-78"/>
                 <a:cs typeface="Amiri" pitchFamily="2" charset="-78"/>
               </a:rPr>
               <a:t>إِجَابَاتُ القِرَاءَةِ</a:t>
@@ -30900,6 +31051,7 @@
                   <a:srgbClr val="8A6D1E"/>
                 </a:solidFill>
                 <a:latin typeface="Amiri" pitchFamily="2" charset="-78"/>
+                <a:ea typeface="Amiri" pitchFamily="2" charset="-78"/>
                 <a:cs typeface="Amiri" pitchFamily="2" charset="-78"/>
               </a:rPr>
               <a:t>الطَّالِبُ الَّذِي فَازَ … سَامِرٌ.</a:t>
@@ -31403,6 +31555,7 @@
                   <a:srgbClr val="8A6D1E"/>
                 </a:solidFill>
                 <a:latin typeface="Amiri" pitchFamily="2" charset="-78"/>
+                <a:ea typeface="Amiri" pitchFamily="2" charset="-78"/>
                 <a:cs typeface="Amiri" pitchFamily="2" charset="-78"/>
               </a:rPr>
               <a:t>الَّتِي كَتَبَتِ الْقِصَّةَ.</a:t>
@@ -31551,6 +31704,7 @@
                   <a:srgbClr val="1B3B6F"/>
                 </a:solidFill>
                 <a:latin typeface="Amiri" pitchFamily="2" charset="-78"/>
+                <a:ea typeface="Amiri" pitchFamily="2" charset="-78"/>
                 <a:cs typeface="Amiri" pitchFamily="2" charset="-78"/>
               </a:rPr>
               <a:t>الَّذِينَ</a:t>
@@ -32080,6 +32234,7 @@
                   <a:srgbClr val="1B3B6F"/>
                 </a:solidFill>
                 <a:latin typeface="Amiri" pitchFamily="2" charset="-78"/>
+                <a:ea typeface="Amiri" pitchFamily="2" charset="-78"/>
                 <a:cs typeface="Amiri" pitchFamily="2" charset="-78"/>
               </a:rPr>
               <a:t>فِيهَا</a:t>
@@ -32736,6 +32891,7 @@
                   <a:srgbClr val="D4AF37"/>
                 </a:solidFill>
                 <a:latin typeface="Amiri" pitchFamily="2" charset="-78"/>
+                <a:ea typeface="Amiri" pitchFamily="2" charset="-78"/>
                 <a:cs typeface="Amiri" pitchFamily="2" charset="-78"/>
               </a:rPr>
               <a:t>م</a:t>
@@ -33056,6 +33212,7 @@
                   <a:srgbClr val="8A6D1E"/>
                 </a:solidFill>
                 <a:latin typeface="Amiri" pitchFamily="2" charset="-78"/>
+                <a:ea typeface="Amiri" pitchFamily="2" charset="-78"/>
                 <a:cs typeface="Amiri" pitchFamily="2" charset="-78"/>
               </a:rPr>
               <a:t>التَّحَدُّثُ</a:t>
@@ -33826,6 +33983,7 @@
                   <a:srgbClr val="1B3B6F"/>
                 </a:solidFill>
                 <a:latin typeface="Amiri" pitchFamily="2" charset="-78"/>
+                <a:ea typeface="Amiri" pitchFamily="2" charset="-78"/>
                 <a:cs typeface="Amiri" pitchFamily="2" charset="-78"/>
               </a:rPr>
               <a:t>مَنْ صَدِيقُكَ؟ صِفْهُ بِـ «الَّذِي».</a:t>
@@ -33963,6 +34121,7 @@
                   <a:srgbClr val="1B3B6F"/>
                 </a:solidFill>
                 <a:latin typeface="Amiri" pitchFamily="2" charset="-78"/>
+                <a:ea typeface="Amiri" pitchFamily="2" charset="-78"/>
                 <a:cs typeface="Amiri" pitchFamily="2" charset="-78"/>
               </a:rPr>
               <a:t>صِفْ مُعَلِّمَةً وَمَكَانًا تُحِبُّهُمَا.</a:t>
@@ -34100,6 +34259,7 @@
                   <a:srgbClr val="1B3B6F"/>
                 </a:solidFill>
                 <a:latin typeface="Amiri" pitchFamily="2" charset="-78"/>
+                <a:ea typeface="Amiri" pitchFamily="2" charset="-78"/>
                 <a:cs typeface="Amiri" pitchFamily="2" charset="-78"/>
               </a:rPr>
               <a:t>صِفْ كِتَابًا أَوْ فِيلْمًا أَعْجَبَكَ: الْكِتَابُ الَّذِي قَرَأْتُهُ …</a:t>
@@ -34275,6 +34435,7 @@
                   <a:srgbClr val="1D5FBF"/>
                 </a:solidFill>
                 <a:latin typeface="Amiri" pitchFamily="2" charset="-78"/>
+                <a:ea typeface="Amiri" pitchFamily="2" charset="-78"/>
                 <a:cs typeface="Amiri" pitchFamily="2" charset="-78"/>
               </a:rPr>
               <a:t>صَدِيقِي هُوَ الشَّخْصُ الَّذِي ___ .</a:t>
@@ -34378,6 +34539,7 @@
                   <a:srgbClr val="1F2A37"/>
                 </a:solidFill>
                 <a:latin typeface="Amiri" pitchFamily="2" charset="-78"/>
+                <a:ea typeface="Amiri" pitchFamily="2" charset="-78"/>
                 <a:cs typeface="Amiri" pitchFamily="2" charset="-78"/>
               </a:rPr>
               <a:t>مُعَلِّمَتِي هِيَ الَّتِي ___ .</a:t>
@@ -34481,6 +34643,7 @@
                   <a:srgbClr val="1F2A37"/>
                 </a:solidFill>
                 <a:latin typeface="Amiri" pitchFamily="2" charset="-78"/>
+                <a:ea typeface="Amiri" pitchFamily="2" charset="-78"/>
                 <a:cs typeface="Amiri" pitchFamily="2" charset="-78"/>
               </a:rPr>
               <a:t>مَدْرَسَتِي هِيَ الْمَكَانُ الَّذِي ___ فِيهِ.</a:t>
@@ -34654,6 +34817,7 @@
                   <a:srgbClr val="1F2A37"/>
                 </a:solidFill>
                 <a:latin typeface="Amiri" pitchFamily="2" charset="-78"/>
+                <a:ea typeface="Amiri" pitchFamily="2" charset="-78"/>
                 <a:cs typeface="Amiri" pitchFamily="2" charset="-78"/>
               </a:rPr>
               <a:t>مَنْ هُوَ صَدِيقُكَ الْمُفَضَّلُ؟</a:t>
@@ -34793,6 +34957,7 @@
                   <a:srgbClr val="1F2A37"/>
                 </a:solidFill>
                 <a:latin typeface="Amiri" pitchFamily="2" charset="-78"/>
+                <a:ea typeface="Amiri" pitchFamily="2" charset="-78"/>
                 <a:cs typeface="Amiri" pitchFamily="2" charset="-78"/>
               </a:rPr>
               <a:t>صَدِيقِي هُوَ الشَّخْصُ الَّذِي يُسَاعِدُنِي دَائِمًا، وَأُمُّهُ هِيَ الَّتِي تَطْبُخُ لَنَا الْكَعْكَ!</a:t>
@@ -34964,6 +35129,7 @@
                   <a:srgbClr val="D4AF37"/>
                 </a:solidFill>
                 <a:latin typeface="Amiri" pitchFamily="2" charset="-78"/>
+                <a:ea typeface="Amiri" pitchFamily="2" charset="-78"/>
                 <a:cs typeface="Amiri" pitchFamily="2" charset="-78"/>
               </a:rPr>
               <a:t>م</a:t>
@@ -35284,6 +35450,7 @@
                   <a:srgbClr val="8A6D1E"/>
                 </a:solidFill>
                 <a:latin typeface="Amiri" pitchFamily="2" charset="-78"/>
+                <a:ea typeface="Amiri" pitchFamily="2" charset="-78"/>
                 <a:cs typeface="Amiri" pitchFamily="2" charset="-78"/>
               </a:rPr>
               <a:t>اُكْتُبْ</a:t>
@@ -35459,6 +35626,7 @@
                   <a:srgbClr val="2E8B57"/>
                 </a:solidFill>
                 <a:latin typeface="Amiri" pitchFamily="2" charset="-78"/>
+                <a:ea typeface="Amiri" pitchFamily="2" charset="-78"/>
                 <a:cs typeface="Amiri" pitchFamily="2" charset="-78"/>
               </a:rPr>
               <a:t>الأَسَاسُ</a:t>
@@ -35753,6 +35921,7 @@
                   <a:srgbClr val="C9780A"/>
                 </a:solidFill>
                 <a:latin typeface="Amiri" pitchFamily="2" charset="-78"/>
+                <a:ea typeface="Amiri" pitchFamily="2" charset="-78"/>
                 <a:cs typeface="Amiri" pitchFamily="2" charset="-78"/>
               </a:rPr>
               <a:t>التَّطْوِيرُ</a:t>
@@ -36047,6 +36216,7 @@
                   <a:srgbClr val="B83227"/>
                 </a:solidFill>
                 <a:latin typeface="Amiri" pitchFamily="2" charset="-78"/>
+                <a:ea typeface="Amiri" pitchFamily="2" charset="-78"/>
                 <a:cs typeface="Amiri" pitchFamily="2" charset="-78"/>
               </a:rPr>
               <a:t>التَّحَدِّي</a:t>
@@ -36337,6 +36507,7 @@
                   <a:srgbClr val="D4AF37"/>
                 </a:solidFill>
                 <a:latin typeface="Amiri" pitchFamily="2" charset="-78"/>
+                <a:ea typeface="Amiri" pitchFamily="2" charset="-78"/>
                 <a:cs typeface="Amiri" pitchFamily="2" charset="-78"/>
               </a:rPr>
               <a:t>م</a:t>
@@ -36657,6 +36828,7 @@
                   <a:srgbClr val="8A6D1E"/>
                 </a:solidFill>
                 <a:latin typeface="Amiri" pitchFamily="2" charset="-78"/>
+                <a:ea typeface="Amiri" pitchFamily="2" charset="-78"/>
                 <a:cs typeface="Amiri" pitchFamily="2" charset="-78"/>
               </a:rPr>
               <a:t>قَوَالِبُ الجُمَلِ</a:t>
@@ -36832,6 +37004,7 @@
                   <a:srgbClr val="1B3B6F"/>
                 </a:solidFill>
                 <a:latin typeface="Amiri" pitchFamily="2" charset="-78"/>
+                <a:ea typeface="Amiri" pitchFamily="2" charset="-78"/>
                 <a:cs typeface="Amiri" pitchFamily="2" charset="-78"/>
               </a:rPr>
               <a:t>الطُّلَّابُ الَّذِينَ ______ .</a:t>
@@ -36908,6 +37081,7 @@
                   <a:srgbClr val="1B3B6F"/>
                 </a:solidFill>
                 <a:latin typeface="Amiri" pitchFamily="2" charset="-78"/>
+                <a:ea typeface="Amiri" pitchFamily="2" charset="-78"/>
                 <a:cs typeface="Amiri" pitchFamily="2" charset="-78"/>
               </a:rPr>
               <a:t>الْكِتَابُ الَّذِي قَرَأْتُهُ ______ .</a:t>
@@ -36984,6 +37158,7 @@
                   <a:srgbClr val="1B3B6F"/>
                 </a:solidFill>
                 <a:latin typeface="Amiri" pitchFamily="2" charset="-78"/>
+                <a:ea typeface="Amiri" pitchFamily="2" charset="-78"/>
                 <a:cs typeface="Amiri" pitchFamily="2" charset="-78"/>
               </a:rPr>
               <a:t>الْمَدْرَسَةُ الَّتِي أَدْرُسُ فِيهَا ______ .</a:t>
@@ -37060,6 +37235,7 @@
                   <a:srgbClr val="1B3B6F"/>
                 </a:solidFill>
                 <a:latin typeface="Amiri" pitchFamily="2" charset="-78"/>
+                <a:ea typeface="Amiri" pitchFamily="2" charset="-78"/>
                 <a:cs typeface="Amiri" pitchFamily="2" charset="-78"/>
               </a:rPr>
               <a:t>الْبَنَاتُ اللَّاتِي ______ .</a:t>
@@ -37235,6 +37411,7 @@
                   <a:srgbClr val="1B3B6F"/>
                 </a:solidFill>
                 <a:latin typeface="Amiri" pitchFamily="2" charset="-78"/>
+                <a:ea typeface="Amiri" pitchFamily="2" charset="-78"/>
                 <a:cs typeface="Amiri" pitchFamily="2" charset="-78"/>
               </a:rPr>
               <a:t>صَدِيقِي هُوَ الشَّخْصُ الَّذِي ______ .</a:t>
@@ -37311,6 +37488,7 @@
                   <a:srgbClr val="1B3B6F"/>
                 </a:solidFill>
                 <a:latin typeface="Amiri" pitchFamily="2" charset="-78"/>
+                <a:ea typeface="Amiri" pitchFamily="2" charset="-78"/>
                 <a:cs typeface="Amiri" pitchFamily="2" charset="-78"/>
               </a:rPr>
               <a:t>أُمِّي هِيَ الَّتِي ______ .</a:t>
@@ -37387,6 +37565,7 @@
                   <a:srgbClr val="1B3B6F"/>
                 </a:solidFill>
                 <a:latin typeface="Amiri" pitchFamily="2" charset="-78"/>
+                <a:ea typeface="Amiri" pitchFamily="2" charset="-78"/>
                 <a:cs typeface="Amiri" pitchFamily="2" charset="-78"/>
               </a:rPr>
               <a:t>أُحِبُّ الْمُعَلِّمَ الَّذِي ______ .</a:t>
@@ -37463,6 +37642,7 @@
                   <a:srgbClr val="1B3B6F"/>
                 </a:solidFill>
                 <a:latin typeface="Amiri" pitchFamily="2" charset="-78"/>
+                <a:ea typeface="Amiri" pitchFamily="2" charset="-78"/>
                 <a:cs typeface="Amiri" pitchFamily="2" charset="-78"/>
               </a:rPr>
               <a:t>هَذِهِ هِيَ الْمَدِينَةُ الَّتِي ______ .</a:t>
@@ -37611,6 +37791,7 @@
                   <a:srgbClr val="1B3B6F"/>
                 </a:solidFill>
                 <a:latin typeface="Amiri" pitchFamily="2" charset="-78"/>
+                <a:ea typeface="Amiri" pitchFamily="2" charset="-78"/>
                 <a:cs typeface="Amiri" pitchFamily="2" charset="-78"/>
               </a:rPr>
               <a:t>الَّذِي  ·  الَّتِي  ·  الَّذِينَ  ·  اللَّاتِي  ·  اللَّذَانِ  ·  اللَّتَانِ  ·  يُسَاعِدُنِي  ·  فَازَ  ·  كَتَبَتْ  ·  قَرَأْتُهُ  ·  فِيهَا  ·  فِيهِ</a:t>
@@ -37744,6 +37925,7 @@
                   <a:srgbClr val="D4AF37"/>
                 </a:solidFill>
                 <a:latin typeface="Amiri" pitchFamily="2" charset="-78"/>
+                <a:ea typeface="Amiri" pitchFamily="2" charset="-78"/>
                 <a:cs typeface="Amiri" pitchFamily="2" charset="-78"/>
               </a:rPr>
               <a:t>م</a:t>
@@ -38064,6 +38246,7 @@
                   <a:srgbClr val="8A6D1E"/>
                 </a:solidFill>
                 <a:latin typeface="Amiri" pitchFamily="2" charset="-78"/>
+                <a:ea typeface="Amiri" pitchFamily="2" charset="-78"/>
                 <a:cs typeface="Amiri" pitchFamily="2" charset="-78"/>
               </a:rPr>
               <a:t>مُهِمَّةُ التَّحَدِّي</a:t>
@@ -38539,6 +38722,7 @@
                   <a:srgbClr val="1B3B6F"/>
                 </a:solidFill>
                 <a:latin typeface="Amiri" pitchFamily="2" charset="-78"/>
+                <a:ea typeface="Amiri" pitchFamily="2" charset="-78"/>
                 <a:cs typeface="Amiri" pitchFamily="2" charset="-78"/>
               </a:rPr>
               <a:t>الشَّخْصُ الَّذِي أُعْجِبُ بِهِ</a:t>
@@ -38615,6 +38799,7 @@
                   <a:srgbClr val="1B3B6F"/>
                 </a:solidFill>
                 <a:latin typeface="Amiri" pitchFamily="2" charset="-78"/>
+                <a:ea typeface="Amiri" pitchFamily="2" charset="-78"/>
                 <a:cs typeface="Amiri" pitchFamily="2" charset="-78"/>
               </a:rPr>
               <a:t>الْكِتَابُ الَّذِي قَرَأْتُهُ</a:t>
@@ -38691,6 +38876,7 @@
                   <a:srgbClr val="1B3B6F"/>
                 </a:solidFill>
                 <a:latin typeface="Amiri" pitchFamily="2" charset="-78"/>
+                <a:ea typeface="Amiri" pitchFamily="2" charset="-78"/>
                 <a:cs typeface="Amiri" pitchFamily="2" charset="-78"/>
               </a:rPr>
               <a:t>الْمَدِينَةُ الَّتِي وُلِدْتُ فِيهَا</a:t>
@@ -38767,6 +38953,7 @@
                   <a:srgbClr val="1B3B6F"/>
                 </a:solidFill>
                 <a:latin typeface="Amiri" pitchFamily="2" charset="-78"/>
+                <a:ea typeface="Amiri" pitchFamily="2" charset="-78"/>
                 <a:cs typeface="Amiri" pitchFamily="2" charset="-78"/>
               </a:rPr>
               <a:t>الْأَصْدِقَاءُ الَّذِينَ …</a:t>
@@ -38843,6 +39030,7 @@
                   <a:srgbClr val="1B3B6F"/>
                 </a:solidFill>
                 <a:latin typeface="Amiri" pitchFamily="2" charset="-78"/>
+                <a:ea typeface="Amiri" pitchFamily="2" charset="-78"/>
                 <a:cs typeface="Amiri" pitchFamily="2" charset="-78"/>
               </a:rPr>
               <a:t>الْمُعَلِّمَاتُ اللَّاتِي …</a:t>
@@ -38919,6 +39107,7 @@
                   <a:srgbClr val="1B3B6F"/>
                 </a:solidFill>
                 <a:latin typeface="Amiri" pitchFamily="2" charset="-78"/>
+                <a:ea typeface="Amiri" pitchFamily="2" charset="-78"/>
                 <a:cs typeface="Amiri" pitchFamily="2" charset="-78"/>
               </a:rPr>
               <a:t>هُوَ الَّذِي …</a:t>
@@ -39090,6 +39279,7 @@
                   <a:srgbClr val="D4AF37"/>
                 </a:solidFill>
                 <a:latin typeface="Amiri" pitchFamily="2" charset="-78"/>
+                <a:ea typeface="Amiri" pitchFamily="2" charset="-78"/>
                 <a:cs typeface="Amiri" pitchFamily="2" charset="-78"/>
               </a:rPr>
               <a:t>م</a:t>
@@ -39410,6 +39600,7 @@
                   <a:srgbClr val="8A6D1E"/>
                 </a:solidFill>
                 <a:latin typeface="Amiri" pitchFamily="2" charset="-78"/>
+                <a:ea typeface="Amiri" pitchFamily="2" charset="-78"/>
                 <a:cs typeface="Amiri" pitchFamily="2" charset="-78"/>
               </a:rPr>
               <a:t>نَمُوذَجُ الإِجَابَةِ</a:t>
@@ -39523,6 +39714,7 @@
                   <a:srgbClr val="1F2A37"/>
                 </a:solidFill>
                 <a:latin typeface="Amiri" pitchFamily="2" charset="-78"/>
+                <a:ea typeface="Amiri" pitchFamily="2" charset="-78"/>
                 <a:cs typeface="Amiri" pitchFamily="2" charset="-78"/>
               </a:rPr>
               <a:t>الشَّخْصُ الَّذِي أُعْجِبُ بِهِ كَثِيرًا هُوَ جَدِّي. جَدِّي هُوَ الَّذِي عَلَّمَنِي الْقُرْآنَ، وَجَدَّتِي هِيَ الَّتِي تَحْكِي لَنَا الْقِصَصَ. أُحِبُّ الْبَيْتَ الَّذِي يَسْكُنَانِ فِيهِ، لِأَنَّ فِيهِ حَدِيقَةً كَبِيرَةً. أَبْنَاءُ عَمِّي الَّذِينَ يَزُورُونَهُمَا كُلَّ أُسْبُوعٍ أَصْدِقَائِي. وَالْكِتَابُ الَّذِي أَهْدَانِي جَدِّي هُوَ أَغْلَى كِتَابٍ عِنْدِي.</a:t>
@@ -40019,6 +40211,7 @@
                   <a:srgbClr val="D4AF37"/>
                 </a:solidFill>
                 <a:latin typeface="Amiri" pitchFamily="2" charset="-78"/>
+                <a:ea typeface="Amiri" pitchFamily="2" charset="-78"/>
                 <a:cs typeface="Amiri" pitchFamily="2" charset="-78"/>
               </a:rPr>
               <a:t>م</a:t>
@@ -40339,6 +40532,7 @@
                   <a:srgbClr val="8A6D1E"/>
                 </a:solidFill>
                 <a:latin typeface="Amiri" pitchFamily="2" charset="-78"/>
+                <a:ea typeface="Amiri" pitchFamily="2" charset="-78"/>
                 <a:cs typeface="Amiri" pitchFamily="2" charset="-78"/>
               </a:rPr>
               <a:t>خَرِيطَةُ الدَّرْسِ</a:t>
@@ -40653,6 +40847,7 @@
                   <a:srgbClr val="0E7C86"/>
                 </a:solidFill>
                 <a:latin typeface="Amiri" pitchFamily="2" charset="-78"/>
+                <a:ea typeface="Amiri" pitchFamily="2" charset="-78"/>
                 <a:cs typeface="Amiri" pitchFamily="2" charset="-78"/>
               </a:rPr>
               <a:t>اِبْدَأِ الآنَ</a:t>
@@ -40929,6 +41124,7 @@
                   <a:srgbClr val="1B3B6F"/>
                 </a:solidFill>
                 <a:latin typeface="Amiri" pitchFamily="2" charset="-78"/>
+                <a:ea typeface="Amiri" pitchFamily="2" charset="-78"/>
                 <a:cs typeface="Amiri" pitchFamily="2" charset="-78"/>
               </a:rPr>
               <a:t>كَلِمَاتٌ وَقَوَاعِدُ</a:t>
@@ -41205,6 +41401,7 @@
                   <a:srgbClr val="6B4C9A"/>
                 </a:solidFill>
                 <a:latin typeface="Amiri" pitchFamily="2" charset="-78"/>
+                <a:ea typeface="Amiri" pitchFamily="2" charset="-78"/>
                 <a:cs typeface="Amiri" pitchFamily="2" charset="-78"/>
               </a:rPr>
               <a:t>شَاهِدْ</a:t>
@@ -41481,6 +41678,7 @@
                   <a:srgbClr val="2F6FB0"/>
                 </a:solidFill>
                 <a:latin typeface="Amiri" pitchFamily="2" charset="-78"/>
+                <a:ea typeface="Amiri" pitchFamily="2" charset="-78"/>
                 <a:cs typeface="Amiri" pitchFamily="2" charset="-78"/>
               </a:rPr>
               <a:t>مَعًا</a:t>
@@ -41757,6 +41955,7 @@
                   <a:srgbClr val="1E6B52"/>
                 </a:solidFill>
                 <a:latin typeface="Amiri" pitchFamily="2" charset="-78"/>
+                <a:ea typeface="Amiri" pitchFamily="2" charset="-78"/>
                 <a:cs typeface="Amiri" pitchFamily="2" charset="-78"/>
               </a:rPr>
               <a:t>وَحْدَكَ</a:t>
@@ -42033,6 +42232,7 @@
                   <a:srgbClr val="8A6D1E"/>
                 </a:solidFill>
                 <a:latin typeface="Amiri" pitchFamily="2" charset="-78"/>
+                <a:ea typeface="Amiri" pitchFamily="2" charset="-78"/>
                 <a:cs typeface="Amiri" pitchFamily="2" charset="-78"/>
               </a:rPr>
               <a:t>قَيِّمْ عَمَلَكَ</a:t>
@@ -42309,6 +42509,7 @@
                   <a:srgbClr val="C45A3C"/>
                 </a:solidFill>
                 <a:latin typeface="Amiri" pitchFamily="2" charset="-78"/>
+                <a:ea typeface="Amiri" pitchFamily="2" charset="-78"/>
                 <a:cs typeface="Amiri" pitchFamily="2" charset="-78"/>
               </a:rPr>
               <a:t>اِسْتَعِدَّ</a:t>
@@ -42552,6 +42753,7 @@
                   <a:srgbClr val="D4AF37"/>
                 </a:solidFill>
                 <a:latin typeface="Amiri" pitchFamily="2" charset="-78"/>
+                <a:ea typeface="Amiri" pitchFamily="2" charset="-78"/>
                 <a:cs typeface="Amiri" pitchFamily="2" charset="-78"/>
               </a:rPr>
               <a:t>م</a:t>
@@ -42872,6 +43074,7 @@
                   <a:srgbClr val="8A6D1E"/>
                 </a:solidFill>
                 <a:latin typeface="Amiri" pitchFamily="2" charset="-78"/>
+                <a:ea typeface="Amiri" pitchFamily="2" charset="-78"/>
                 <a:cs typeface="Amiri" pitchFamily="2" charset="-78"/>
               </a:rPr>
               <a:t>قَيِّمْ عَمَلَكَ</a:t>
@@ -44029,6 +44232,7 @@
                   <a:srgbClr val="D4AF37"/>
                 </a:solidFill>
                 <a:latin typeface="Amiri" pitchFamily="2" charset="-78"/>
+                <a:ea typeface="Amiri" pitchFamily="2" charset="-78"/>
                 <a:cs typeface="Amiri" pitchFamily="2" charset="-78"/>
               </a:rPr>
               <a:t>م</a:t>
@@ -44349,6 +44553,7 @@
                   <a:srgbClr val="8A6D1E"/>
                 </a:solidFill>
                 <a:latin typeface="Amiri" pitchFamily="2" charset="-78"/>
+                <a:ea typeface="Amiri" pitchFamily="2" charset="-78"/>
                 <a:cs typeface="Amiri" pitchFamily="2" charset="-78"/>
               </a:rPr>
               <a:t>تَذْكِرَةُ الخُرُوجِ</a:t>
@@ -44623,6 +44828,7 @@
                   <a:srgbClr val="1F2A37"/>
                 </a:solidFill>
                 <a:latin typeface="Amiri" pitchFamily="2" charset="-78"/>
+                <a:ea typeface="Amiri" pitchFamily="2" charset="-78"/>
                 <a:cs typeface="Amiri" pitchFamily="2" charset="-78"/>
               </a:rPr>
               <a:t>الرَّجُلُ الَّذِي جَاءَ</a:t>
@@ -44724,6 +44930,7 @@
                   <a:srgbClr val="1F2A37"/>
                 </a:solidFill>
                 <a:latin typeface="Amiri" pitchFamily="2" charset="-78"/>
+                <a:ea typeface="Amiri" pitchFamily="2" charset="-78"/>
                 <a:cs typeface="Amiri" pitchFamily="2" charset="-78"/>
               </a:rPr>
               <a:t>الرَّجُلُ الَّتِي جَاءَ</a:t>
@@ -44825,6 +45032,7 @@
                   <a:srgbClr val="1F2A37"/>
                 </a:solidFill>
                 <a:latin typeface="Amiri" pitchFamily="2" charset="-78"/>
+                <a:ea typeface="Amiri" pitchFamily="2" charset="-78"/>
                 <a:cs typeface="Amiri" pitchFamily="2" charset="-78"/>
               </a:rPr>
               <a:t>الرَّجُلُ الَّذِينَ جَاءُوا</a:t>
@@ -45061,6 +45269,7 @@
                   <a:srgbClr val="1F2A37"/>
                 </a:solidFill>
                 <a:latin typeface="Amiri" pitchFamily="2" charset="-78"/>
+                <a:ea typeface="Amiri" pitchFamily="2" charset="-78"/>
                 <a:cs typeface="Amiri" pitchFamily="2" charset="-78"/>
               </a:rPr>
               <a:t>الْأُمَّهَاتُ الَّذِينَ طَبَخُوا</a:t>
@@ -45162,6 +45371,7 @@
                   <a:srgbClr val="1F2A37"/>
                 </a:solidFill>
                 <a:latin typeface="Amiri" pitchFamily="2" charset="-78"/>
+                <a:ea typeface="Amiri" pitchFamily="2" charset="-78"/>
                 <a:cs typeface="Amiri" pitchFamily="2" charset="-78"/>
               </a:rPr>
               <a:t>الْأُمَّهَاتُ اللَّاتِي طَبَخْنَ</a:t>
@@ -45263,6 +45473,7 @@
                   <a:srgbClr val="1F2A37"/>
                 </a:solidFill>
                 <a:latin typeface="Amiri" pitchFamily="2" charset="-78"/>
+                <a:ea typeface="Amiri" pitchFamily="2" charset="-78"/>
                 <a:cs typeface="Amiri" pitchFamily="2" charset="-78"/>
               </a:rPr>
               <a:t>الْأُمَّهَاتُ الَّذِي طَبَخَ</a:t>
@@ -45499,6 +45710,7 @@
                   <a:srgbClr val="1F2A37"/>
                 </a:solidFill>
                 <a:latin typeface="Amiri" pitchFamily="2" charset="-78"/>
+                <a:ea typeface="Amiri" pitchFamily="2" charset="-78"/>
                 <a:cs typeface="Amiri" pitchFamily="2" charset="-78"/>
               </a:rPr>
               <a:t>الْفِيلْمُ الَّذِي شَاهَدْتُهُ</a:t>
@@ -45600,6 +45812,7 @@
                   <a:srgbClr val="1F2A37"/>
                 </a:solidFill>
                 <a:latin typeface="Amiri" pitchFamily="2" charset="-78"/>
+                <a:ea typeface="Amiri" pitchFamily="2" charset="-78"/>
                 <a:cs typeface="Amiri" pitchFamily="2" charset="-78"/>
               </a:rPr>
               <a:t>الْفِيلْمُ الَّذِي شَاهَدْتُ هُوَ</a:t>
@@ -45701,6 +45914,7 @@
                   <a:srgbClr val="1F2A37"/>
                 </a:solidFill>
                 <a:latin typeface="Amiri" pitchFamily="2" charset="-78"/>
+                <a:ea typeface="Amiri" pitchFamily="2" charset="-78"/>
                 <a:cs typeface="Amiri" pitchFamily="2" charset="-78"/>
               </a:rPr>
               <a:t>الْفِيلْمُ الَّتِي شَاهَدْتُهَا</a:t>
@@ -45944,6 +46158,7 @@
                   <a:srgbClr val="D4AF37"/>
                 </a:solidFill>
                 <a:latin typeface="Amiri" pitchFamily="2" charset="-78"/>
+                <a:ea typeface="Amiri" pitchFamily="2" charset="-78"/>
                 <a:cs typeface="Amiri" pitchFamily="2" charset="-78"/>
               </a:rPr>
               <a:t>م</a:t>
@@ -46264,6 +46479,7 @@
                   <a:srgbClr val="8A6D1E"/>
                 </a:solidFill>
                 <a:latin typeface="Amiri" pitchFamily="2" charset="-78"/>
+                <a:ea typeface="Amiri" pitchFamily="2" charset="-78"/>
                 <a:cs typeface="Amiri" pitchFamily="2" charset="-78"/>
               </a:rPr>
               <a:t>إِجَابَاتُ تَذْكِرَةِ الخُرُوجِ</a:t>
@@ -46565,6 +46781,7 @@
                   <a:srgbClr val="1F2A37"/>
                 </a:solidFill>
                 <a:latin typeface="Amiri" pitchFamily="2" charset="-78"/>
+                <a:ea typeface="Amiri" pitchFamily="2" charset="-78"/>
                 <a:cs typeface="Amiri" pitchFamily="2" charset="-78"/>
               </a:rPr>
               <a:t>الرَّجُلُ الَّذِي جَاءَ</a:t>
@@ -46666,6 +46883,7 @@
                   <a:srgbClr val="9AA1AB"/>
                 </a:solidFill>
                 <a:latin typeface="Amiri" pitchFamily="2" charset="-78"/>
+                <a:ea typeface="Amiri" pitchFamily="2" charset="-78"/>
                 <a:cs typeface="Amiri" pitchFamily="2" charset="-78"/>
               </a:rPr>
               <a:t>الرَّجُلُ الَّتِي جَاءَ</a:t>
@@ -46767,6 +46985,7 @@
                   <a:srgbClr val="9AA1AB"/>
                 </a:solidFill>
                 <a:latin typeface="Amiri" pitchFamily="2" charset="-78"/>
+                <a:ea typeface="Amiri" pitchFamily="2" charset="-78"/>
                 <a:cs typeface="Amiri" pitchFamily="2" charset="-78"/>
               </a:rPr>
               <a:t>الرَّجُلُ الَّذِينَ جَاءُوا</a:t>
@@ -47041,6 +47260,7 @@
                   <a:srgbClr val="9AA1AB"/>
                 </a:solidFill>
                 <a:latin typeface="Amiri" pitchFamily="2" charset="-78"/>
+                <a:ea typeface="Amiri" pitchFamily="2" charset="-78"/>
                 <a:cs typeface="Amiri" pitchFamily="2" charset="-78"/>
               </a:rPr>
               <a:t>الْأُمَّهَاتُ الَّذِينَ طَبَخُوا</a:t>
@@ -47169,6 +47389,7 @@
                   <a:srgbClr val="1F2A37"/>
                 </a:solidFill>
                 <a:latin typeface="Amiri" pitchFamily="2" charset="-78"/>
+                <a:ea typeface="Amiri" pitchFamily="2" charset="-78"/>
                 <a:cs typeface="Amiri" pitchFamily="2" charset="-78"/>
               </a:rPr>
               <a:t>الْأُمَّهَاتُ اللَّاتِي طَبَخْنَ</a:t>
@@ -47270,6 +47491,7 @@
                   <a:srgbClr val="9AA1AB"/>
                 </a:solidFill>
                 <a:latin typeface="Amiri" pitchFamily="2" charset="-78"/>
+                <a:ea typeface="Amiri" pitchFamily="2" charset="-78"/>
                 <a:cs typeface="Amiri" pitchFamily="2" charset="-78"/>
               </a:rPr>
               <a:t>الْأُمَّهَاتُ الَّذِي طَبَخَ</a:t>
@@ -47571,6 +47793,7 @@
                   <a:srgbClr val="1F2A37"/>
                 </a:solidFill>
                 <a:latin typeface="Amiri" pitchFamily="2" charset="-78"/>
+                <a:ea typeface="Amiri" pitchFamily="2" charset="-78"/>
                 <a:cs typeface="Amiri" pitchFamily="2" charset="-78"/>
               </a:rPr>
               <a:t>الْفِيلْمُ الَّذِي شَاهَدْتُهُ</a:t>
@@ -47672,6 +47895,7 @@
                   <a:srgbClr val="9AA1AB"/>
                 </a:solidFill>
                 <a:latin typeface="Amiri" pitchFamily="2" charset="-78"/>
+                <a:ea typeface="Amiri" pitchFamily="2" charset="-78"/>
                 <a:cs typeface="Amiri" pitchFamily="2" charset="-78"/>
               </a:rPr>
               <a:t>الْفِيلْمُ الَّذِي شَاهَدْتُ هُوَ</a:t>
@@ -47773,6 +47997,7 @@
                   <a:srgbClr val="9AA1AB"/>
                 </a:solidFill>
                 <a:latin typeface="Amiri" pitchFamily="2" charset="-78"/>
+                <a:ea typeface="Amiri" pitchFamily="2" charset="-78"/>
                 <a:cs typeface="Amiri" pitchFamily="2" charset="-78"/>
               </a:rPr>
               <a:t>الْفِيلْمُ الَّتِي شَاهَدْتُهَا</a:t>
@@ -48054,6 +48279,7 @@
                   <a:srgbClr val="D4AF37"/>
                 </a:solidFill>
                 <a:latin typeface="Amiri" pitchFamily="2" charset="-78"/>
+                <a:ea typeface="Amiri" pitchFamily="2" charset="-78"/>
                 <a:cs typeface="Amiri" pitchFamily="2" charset="-78"/>
               </a:rPr>
               <a:t>م</a:t>
@@ -48374,6 +48600,7 @@
                   <a:srgbClr val="8A6D1E"/>
                 </a:solidFill>
                 <a:latin typeface="Amiri" pitchFamily="2" charset="-78"/>
+                <a:ea typeface="Amiri" pitchFamily="2" charset="-78"/>
                 <a:cs typeface="Amiri" pitchFamily="2" charset="-78"/>
               </a:rPr>
               <a:t>التَّحْضِيرُ لِلدَّرْسِ القَادِمِ</a:t>
@@ -48587,6 +48814,7 @@
                   <a:srgbClr val="1B3B6F"/>
                 </a:solidFill>
                 <a:latin typeface="Amiri" pitchFamily="2" charset="-78"/>
+                <a:ea typeface="Amiri" pitchFamily="2" charset="-78"/>
                 <a:cs typeface="Amiri" pitchFamily="2" charset="-78"/>
               </a:rPr>
               <a:t>لِي</a:t>
@@ -48676,6 +48904,7 @@
                   <a:srgbClr val="1B3B6F"/>
                 </a:solidFill>
                 <a:latin typeface="Amiri" pitchFamily="2" charset="-78"/>
+                <a:ea typeface="Amiri" pitchFamily="2" charset="-78"/>
                 <a:cs typeface="Amiri" pitchFamily="2" charset="-78"/>
               </a:rPr>
               <a:t>لَكَ · لَكِ</a:t>
@@ -48765,6 +48994,7 @@
                   <a:srgbClr val="1B3B6F"/>
                 </a:solidFill>
                 <a:latin typeface="Amiri" pitchFamily="2" charset="-78"/>
+                <a:ea typeface="Amiri" pitchFamily="2" charset="-78"/>
                 <a:cs typeface="Amiri" pitchFamily="2" charset="-78"/>
               </a:rPr>
               <a:t>لَهُ · لَهَا</a:t>
@@ -48854,6 +49084,7 @@
                   <a:srgbClr val="1B3B6F"/>
                 </a:solidFill>
                 <a:latin typeface="Amiri" pitchFamily="2" charset="-78"/>
+                <a:ea typeface="Amiri" pitchFamily="2" charset="-78"/>
                 <a:cs typeface="Amiri" pitchFamily="2" charset="-78"/>
               </a:rPr>
               <a:t>بِهِ</a:t>
@@ -48943,6 +49174,7 @@
                   <a:srgbClr val="1B3B6F"/>
                 </a:solidFill>
                 <a:latin typeface="Amiri" pitchFamily="2" charset="-78"/>
+                <a:ea typeface="Amiri" pitchFamily="2" charset="-78"/>
                 <a:cs typeface="Amiri" pitchFamily="2" charset="-78"/>
               </a:rPr>
               <a:t>مَعِي</a:t>
@@ -49108,6 +49340,7 @@
                   <a:srgbClr val="1B3B6F"/>
                 </a:solidFill>
                 <a:latin typeface="Amiri" pitchFamily="2" charset="-78"/>
+                <a:ea typeface="Amiri" pitchFamily="2" charset="-78"/>
                 <a:cs typeface="Amiri" pitchFamily="2" charset="-78"/>
               </a:rPr>
               <a:t>لِي · لَكَ · لَكِ · ______</a:t>
@@ -49777,6 +50010,7 @@
                   <a:srgbClr val="FFFFFF"/>
                 </a:solidFill>
                 <a:latin typeface="Amiri" pitchFamily="2" charset="-78"/>
+                <a:ea typeface="Amiri" pitchFamily="2" charset="-78"/>
                 <a:cs typeface="Amiri" pitchFamily="2" charset="-78"/>
               </a:rPr>
               <a:t>أَحْسَنْتُمْ! إِلَى اللِّقَاءِ</a:t>
@@ -49929,6 +50163,7 @@
                   <a:srgbClr val="D4AF37"/>
                 </a:solidFill>
                 <a:latin typeface="Amiri" pitchFamily="2" charset="-78"/>
+                <a:ea typeface="Amiri" pitchFamily="2" charset="-78"/>
                 <a:cs typeface="Amiri" pitchFamily="2" charset="-78"/>
               </a:rPr>
               <a:t>الضَّمَائِرُ مَعَ اللَّامِ وَالْبَاءِ</a:t>
@@ -50062,6 +50297,7 @@
                   <a:srgbClr val="D4AF37"/>
                 </a:solidFill>
                 <a:latin typeface="Amiri" pitchFamily="2" charset="-78"/>
+                <a:ea typeface="Amiri" pitchFamily="2" charset="-78"/>
                 <a:cs typeface="Amiri" pitchFamily="2" charset="-78"/>
               </a:rPr>
               <a:t>م</a:t>
@@ -50382,6 +50618,7 @@
                   <a:srgbClr val="8A6D1E"/>
                 </a:solidFill>
                 <a:latin typeface="Amiri" pitchFamily="2" charset="-78"/>
+                <a:ea typeface="Amiri" pitchFamily="2" charset="-78"/>
                 <a:cs typeface="Amiri" pitchFamily="2" charset="-78"/>
               </a:rPr>
               <a:t>اِبْدَأِ الآنَ</a:t>
@@ -50656,6 +50893,7 @@
                   <a:srgbClr val="1F2A37"/>
                 </a:solidFill>
                 <a:latin typeface="Amiri" pitchFamily="2" charset="-78"/>
+                <a:ea typeface="Amiri" pitchFamily="2" charset="-78"/>
                 <a:cs typeface="Amiri" pitchFamily="2" charset="-78"/>
               </a:rPr>
               <a:t>هَذِهِ كِتَابٌ.</a:t>
@@ -50757,6 +50995,7 @@
                   <a:srgbClr val="1F2A37"/>
                 </a:solidFill>
                 <a:latin typeface="Amiri" pitchFamily="2" charset="-78"/>
+                <a:ea typeface="Amiri" pitchFamily="2" charset="-78"/>
                 <a:cs typeface="Amiri" pitchFamily="2" charset="-78"/>
               </a:rPr>
               <a:t>هَذَا كِتَابٌ.</a:t>
@@ -50858,6 +51097,7 @@
                   <a:srgbClr val="1F2A37"/>
                 </a:solidFill>
                 <a:latin typeface="Amiri" pitchFamily="2" charset="-78"/>
+                <a:ea typeface="Amiri" pitchFamily="2" charset="-78"/>
                 <a:cs typeface="Amiri" pitchFamily="2" charset="-78"/>
               </a:rPr>
               <a:t>هَؤُلَاءِ كِتَابٌ.</a:t>
@@ -51094,6 +51334,7 @@
                   <a:srgbClr val="1F2A37"/>
                 </a:solidFill>
                 <a:latin typeface="Amiri" pitchFamily="2" charset="-78"/>
+                <a:ea typeface="Amiri" pitchFamily="2" charset="-78"/>
                 <a:cs typeface="Amiri" pitchFamily="2" charset="-78"/>
               </a:rPr>
               <a:t>قَرَأْتُهُ.</a:t>
@@ -51195,6 +51436,7 @@
                   <a:srgbClr val="1F2A37"/>
                 </a:solidFill>
                 <a:latin typeface="Amiri" pitchFamily="2" charset="-78"/>
+                <a:ea typeface="Amiri" pitchFamily="2" charset="-78"/>
                 <a:cs typeface="Amiri" pitchFamily="2" charset="-78"/>
               </a:rPr>
               <a:t>قَرَأْتُهَا.</a:t>
@@ -51296,6 +51538,7 @@
                   <a:srgbClr val="1F2A37"/>
                 </a:solidFill>
                 <a:latin typeface="Amiri" pitchFamily="2" charset="-78"/>
+                <a:ea typeface="Amiri" pitchFamily="2" charset="-78"/>
                 <a:cs typeface="Amiri" pitchFamily="2" charset="-78"/>
               </a:rPr>
               <a:t>قَرَأْتُكَ.</a:t>
@@ -51532,6 +51775,7 @@
                   <a:srgbClr val="1F2A37"/>
                 </a:solidFill>
                 <a:latin typeface="Amiri" pitchFamily="2" charset="-78"/>
+                <a:ea typeface="Amiri" pitchFamily="2" charset="-78"/>
                 <a:cs typeface="Amiri" pitchFamily="2" charset="-78"/>
               </a:rPr>
               <a:t>كِتَابُهَا</a:t>
@@ -51633,6 +51877,7 @@
                   <a:srgbClr val="1F2A37"/>
                 </a:solidFill>
                 <a:latin typeface="Amiri" pitchFamily="2" charset="-78"/>
+                <a:ea typeface="Amiri" pitchFamily="2" charset="-78"/>
                 <a:cs typeface="Amiri" pitchFamily="2" charset="-78"/>
               </a:rPr>
               <a:t>كِتَابِي</a:t>
@@ -51734,6 +51979,7 @@
                   <a:srgbClr val="1F2A37"/>
                 </a:solidFill>
                 <a:latin typeface="Amiri" pitchFamily="2" charset="-78"/>
+                <a:ea typeface="Amiri" pitchFamily="2" charset="-78"/>
                 <a:cs typeface="Amiri" pitchFamily="2" charset="-78"/>
               </a:rPr>
               <a:t>كِتَابُهُ</a:t>
@@ -51970,6 +52216,7 @@
                   <a:srgbClr val="1F2A37"/>
                 </a:solidFill>
                 <a:latin typeface="Amiri" pitchFamily="2" charset="-78"/>
+                <a:ea typeface="Amiri" pitchFamily="2" charset="-78"/>
                 <a:cs typeface="Amiri" pitchFamily="2" charset="-78"/>
               </a:rPr>
               <a:t>الطُّلَّابُ</a:t>
@@ -52071,6 +52318,7 @@
                   <a:srgbClr val="1F2A37"/>
                 </a:solidFill>
                 <a:latin typeface="Amiri" pitchFamily="2" charset="-78"/>
+                <a:ea typeface="Amiri" pitchFamily="2" charset="-78"/>
                 <a:cs typeface="Amiri" pitchFamily="2" charset="-78"/>
               </a:rPr>
               <a:t>الطَّالِبَتَانِ</a:t>
@@ -52172,6 +52420,7 @@
                   <a:srgbClr val="1F2A37"/>
                 </a:solidFill>
                 <a:latin typeface="Amiri" pitchFamily="2" charset="-78"/>
+                <a:ea typeface="Amiri" pitchFamily="2" charset="-78"/>
                 <a:cs typeface="Amiri" pitchFamily="2" charset="-78"/>
               </a:rPr>
               <a:t>الطَّالِبَاتُ</a:t>
@@ -52945,6 +53194,7 @@
                   <a:srgbClr val="D4AF37"/>
                 </a:solidFill>
                 <a:latin typeface="Amiri" pitchFamily="2" charset="-78"/>
+                <a:ea typeface="Amiri" pitchFamily="2" charset="-78"/>
                 <a:cs typeface="Amiri" pitchFamily="2" charset="-78"/>
               </a:rPr>
               <a:t>م</a:t>
@@ -53265,6 +53515,7 @@
                   <a:srgbClr val="8A6D1E"/>
                 </a:solidFill>
                 <a:latin typeface="Amiri" pitchFamily="2" charset="-78"/>
+                <a:ea typeface="Amiri" pitchFamily="2" charset="-78"/>
                 <a:cs typeface="Amiri" pitchFamily="2" charset="-78"/>
               </a:rPr>
               <a:t>الإِجَابَاتُ وَالتَّعْلِيلُ</a:t>
@@ -53539,6 +53790,7 @@
                   <a:srgbClr val="9AA1AB"/>
                 </a:solidFill>
                 <a:latin typeface="Amiri" pitchFamily="2" charset="-78"/>
+                <a:ea typeface="Amiri" pitchFamily="2" charset="-78"/>
                 <a:cs typeface="Amiri" pitchFamily="2" charset="-78"/>
               </a:rPr>
               <a:t>هَذِهِ كِتَابٌ.</a:t>
@@ -53667,6 +53919,7 @@
                   <a:srgbClr val="1F2A37"/>
                 </a:solidFill>
                 <a:latin typeface="Amiri" pitchFamily="2" charset="-78"/>
+                <a:ea typeface="Amiri" pitchFamily="2" charset="-78"/>
                 <a:cs typeface="Amiri" pitchFamily="2" charset="-78"/>
               </a:rPr>
               <a:t>هَذَا كِتَابٌ.</a:t>
@@ -53768,6 +54021,7 @@
                   <a:srgbClr val="9AA1AB"/>
                 </a:solidFill>
                 <a:latin typeface="Amiri" pitchFamily="2" charset="-78"/>
+                <a:ea typeface="Amiri" pitchFamily="2" charset="-78"/>
                 <a:cs typeface="Amiri" pitchFamily="2" charset="-78"/>
               </a:rPr>
               <a:t>هَؤُلَاءِ كِتَابٌ.</a:t>
@@ -54069,6 +54323,7 @@
                   <a:srgbClr val="1F2A37"/>
                 </a:solidFill>
                 <a:latin typeface="Amiri" pitchFamily="2" charset="-78"/>
+                <a:ea typeface="Amiri" pitchFamily="2" charset="-78"/>
                 <a:cs typeface="Amiri" pitchFamily="2" charset="-78"/>
               </a:rPr>
               <a:t>قَرَأْتُهُ.</a:t>
@@ -54170,6 +54425,7 @@
                   <a:srgbClr val="9AA1AB"/>
                 </a:solidFill>
                 <a:latin typeface="Amiri" pitchFamily="2" charset="-78"/>
+                <a:ea typeface="Amiri" pitchFamily="2" charset="-78"/>
                 <a:cs typeface="Amiri" pitchFamily="2" charset="-78"/>
               </a:rPr>
               <a:t>قَرَأْتُهَا.</a:t>
@@ -54271,6 +54527,7 @@
                   <a:srgbClr val="9AA1AB"/>
                 </a:solidFill>
                 <a:latin typeface="Amiri" pitchFamily="2" charset="-78"/>
+                <a:ea typeface="Amiri" pitchFamily="2" charset="-78"/>
                 <a:cs typeface="Amiri" pitchFamily="2" charset="-78"/>
               </a:rPr>
               <a:t>قَرَأْتُكَ.</a:t>
@@ -54545,6 +54802,7 @@
                   <a:srgbClr val="9AA1AB"/>
                 </a:solidFill>
                 <a:latin typeface="Amiri" pitchFamily="2" charset="-78"/>
+                <a:ea typeface="Amiri" pitchFamily="2" charset="-78"/>
                 <a:cs typeface="Amiri" pitchFamily="2" charset="-78"/>
               </a:rPr>
               <a:t>كِتَابُهَا</a:t>
@@ -54646,6 +54904,7 @@
                   <a:srgbClr val="9AA1AB"/>
                 </a:solidFill>
                 <a:latin typeface="Amiri" pitchFamily="2" charset="-78"/>
+                <a:ea typeface="Amiri" pitchFamily="2" charset="-78"/>
                 <a:cs typeface="Amiri" pitchFamily="2" charset="-78"/>
               </a:rPr>
               <a:t>كِتَابِي</a:t>
@@ -54774,6 +55033,7 @@
                   <a:srgbClr val="1F2A37"/>
                 </a:solidFill>
                 <a:latin typeface="Amiri" pitchFamily="2" charset="-78"/>
+                <a:ea typeface="Amiri" pitchFamily="2" charset="-78"/>
                 <a:cs typeface="Amiri" pitchFamily="2" charset="-78"/>
               </a:rPr>
               <a:t>كِتَابُهُ</a:t>
@@ -55048,6 +55308,7 @@
                   <a:srgbClr val="9AA1AB"/>
                 </a:solidFill>
                 <a:latin typeface="Amiri" pitchFamily="2" charset="-78"/>
+                <a:ea typeface="Amiri" pitchFamily="2" charset="-78"/>
                 <a:cs typeface="Amiri" pitchFamily="2" charset="-78"/>
               </a:rPr>
               <a:t>الطُّلَّابُ</a:t>
@@ -55149,6 +55410,7 @@
                   <a:srgbClr val="9AA1AB"/>
                 </a:solidFill>
                 <a:latin typeface="Amiri" pitchFamily="2" charset="-78"/>
+                <a:ea typeface="Amiri" pitchFamily="2" charset="-78"/>
                 <a:cs typeface="Amiri" pitchFamily="2" charset="-78"/>
               </a:rPr>
               <a:t>الطَّالِبَتَانِ</a:t>
@@ -55277,6 +55539,7 @@
                   <a:srgbClr val="1F2A37"/>
                 </a:solidFill>
                 <a:latin typeface="Amiri" pitchFamily="2" charset="-78"/>
+                <a:ea typeface="Amiri" pitchFamily="2" charset="-78"/>
                 <a:cs typeface="Amiri" pitchFamily="2" charset="-78"/>
               </a:rPr>
               <a:t>الطَّالِبَاتُ</a:t>
@@ -55969,6 +56232,7 @@
                   <a:srgbClr val="1B3B6F"/>
                 </a:solidFill>
                 <a:latin typeface="Amiri" pitchFamily="2" charset="-78"/>
+                <a:ea typeface="Amiri" pitchFamily="2" charset="-78"/>
                 <a:cs typeface="Amiri" pitchFamily="2" charset="-78"/>
               </a:rPr>
               <a:t>الْوَلَدُ </a:t>
@@ -55985,6 +56249,7 @@
                   <a:srgbClr val="0E7C86"/>
                 </a:solidFill>
                 <a:latin typeface="Amiri" pitchFamily="2" charset="-78"/>
+                <a:ea typeface="Amiri" pitchFamily="2" charset="-78"/>
                 <a:cs typeface="Amiri" pitchFamily="2" charset="-78"/>
               </a:rPr>
               <a:t>الَّذِي</a:t>
@@ -56001,6 +56266,7 @@
                   <a:srgbClr val="1B3B6F"/>
                 </a:solidFill>
                 <a:latin typeface="Amiri" pitchFamily="2" charset="-78"/>
+                <a:ea typeface="Amiri" pitchFamily="2" charset="-78"/>
                 <a:cs typeface="Amiri" pitchFamily="2" charset="-78"/>
               </a:rPr>
               <a:t> يَسْكُنُ هُنَا ‖ الْبِنْتُ </a:t>
@@ -56017,6 +56283,7 @@
                   <a:srgbClr val="D6336C"/>
                 </a:solidFill>
                 <a:latin typeface="Amiri" pitchFamily="2" charset="-78"/>
+                <a:ea typeface="Amiri" pitchFamily="2" charset="-78"/>
                 <a:cs typeface="Amiri" pitchFamily="2" charset="-78"/>
               </a:rPr>
               <a:t>الَّتِي</a:t>
@@ -56033,6 +56300,7 @@
                   <a:srgbClr val="1B3B6F"/>
                 </a:solidFill>
                 <a:latin typeface="Amiri" pitchFamily="2" charset="-78"/>
+                <a:ea typeface="Amiri" pitchFamily="2" charset="-78"/>
                 <a:cs typeface="Amiri" pitchFamily="2" charset="-78"/>
               </a:rPr>
               <a:t> تَسْكُنُ هُنَا</a:t>
@@ -56166,6 +56434,7 @@
                   <a:srgbClr val="D4AF37"/>
                 </a:solidFill>
                 <a:latin typeface="Amiri" pitchFamily="2" charset="-78"/>
+                <a:ea typeface="Amiri" pitchFamily="2" charset="-78"/>
                 <a:cs typeface="Amiri" pitchFamily="2" charset="-78"/>
               </a:rPr>
               <a:t>م</a:t>
@@ -56486,6 +56755,7 @@
                   <a:srgbClr val="8A6D1E"/>
                 </a:solidFill>
                 <a:latin typeface="Amiri" pitchFamily="2" charset="-78"/>
+                <a:ea typeface="Amiri" pitchFamily="2" charset="-78"/>
                 <a:cs typeface="Amiri" pitchFamily="2" charset="-78"/>
               </a:rPr>
               <a:t>الأَهْدَافُ وَمَعَايِيرُ النَّجَاحِ</a:t>
@@ -56634,6 +56904,7 @@
                   <a:srgbClr val="8A6D1E"/>
                 </a:solidFill>
                 <a:latin typeface="Amiri" pitchFamily="2" charset="-78"/>
+                <a:ea typeface="Amiri" pitchFamily="2" charset="-78"/>
                 <a:cs typeface="Amiri" pitchFamily="2" charset="-78"/>
               </a:rPr>
               <a:t>سَتَتَعَلَّمُ اليَوْمَ</a:t>
@@ -57789,6 +58060,7 @@
                   <a:srgbClr val="D4AF37"/>
                 </a:solidFill>
                 <a:latin typeface="Amiri" pitchFamily="2" charset="-78"/>
+                <a:ea typeface="Amiri" pitchFamily="2" charset="-78"/>
                 <a:cs typeface="Amiri" pitchFamily="2" charset="-78"/>
               </a:rPr>
               <a:t>م</a:t>
@@ -58109,6 +58381,7 @@
                   <a:srgbClr val="8A6D1E"/>
                 </a:solidFill>
                 <a:latin typeface="Amiri" pitchFamily="2" charset="-78"/>
+                <a:ea typeface="Amiri" pitchFamily="2" charset="-78"/>
                 <a:cs typeface="Amiri" pitchFamily="2" charset="-78"/>
               </a:rPr>
               <a:t>مُصْطَلَحَاتُ الدَّرْسِ</a:t>
@@ -58347,6 +58620,7 @@
                   <a:srgbClr val="1B3B6F"/>
                 </a:solidFill>
                 <a:latin typeface="Amiri" pitchFamily="2" charset="-78"/>
+                <a:ea typeface="Amiri" pitchFamily="2" charset="-78"/>
                 <a:cs typeface="Amiri" pitchFamily="2" charset="-78"/>
               </a:rPr>
               <a:t>الِاسْمُ الْمَوْصُولُ</a:t>
@@ -58396,11 +58670,12 @@
               <a:buNone/>
             </a:pPr>
             <a:r>
-              <a:rPr lang="en-US" sz="1100" i="1" dirty="0">
+              <a:rPr lang="ar-SA" sz="1100" i="1" dirty="0">
                 <a:solidFill>
                   <a:srgbClr val="5A6472"/>
                 </a:solidFill>
                 <a:latin typeface="Calibri" pitchFamily="34" charset="0"/>
+                <a:ea typeface="Amiri" pitchFamily="2" charset="-78"/>
                 <a:cs typeface="Amiri" pitchFamily="2" charset="-78"/>
               </a:rPr>
               <a:t>al-ِs-mu al-maw-ṣū-lu</a:t>
@@ -58439,6 +58714,7 @@
                   <a:srgbClr val="8A6D1E"/>
                 </a:solidFill>
                 <a:latin typeface="Amiri" pitchFamily="2" charset="-78"/>
+                <a:ea typeface="Amiri" pitchFamily="2" charset="-78"/>
                 <a:cs typeface="Amiri" pitchFamily="2" charset="-78"/>
               </a:rPr>
               <a:t>الَّذِي · الَّتِي</a:t>
@@ -58639,6 +58915,7 @@
                   <a:srgbClr val="1B3B6F"/>
                 </a:solidFill>
                 <a:latin typeface="Amiri" pitchFamily="2" charset="-78"/>
+                <a:ea typeface="Amiri" pitchFamily="2" charset="-78"/>
                 <a:cs typeface="Amiri" pitchFamily="2" charset="-78"/>
               </a:rPr>
               <a:t>الَّذِي</a:t>
@@ -58731,6 +59008,7 @@
                   <a:srgbClr val="8A6D1E"/>
                 </a:solidFill>
                 <a:latin typeface="Amiri" pitchFamily="2" charset="-78"/>
+                <a:ea typeface="Amiri" pitchFamily="2" charset="-78"/>
                 <a:cs typeface="Amiri" pitchFamily="2" charset="-78"/>
               </a:rPr>
               <a:t>الطَّالِبُ الَّذِي فَازَ</a:t>
@@ -58931,6 +59209,7 @@
                   <a:srgbClr val="1B3B6F"/>
                 </a:solidFill>
                 <a:latin typeface="Amiri" pitchFamily="2" charset="-78"/>
+                <a:ea typeface="Amiri" pitchFamily="2" charset="-78"/>
                 <a:cs typeface="Amiri" pitchFamily="2" charset="-78"/>
               </a:rPr>
               <a:t>الَّتِي</a:t>
@@ -59023,6 +59302,7 @@
                   <a:srgbClr val="8A6D1E"/>
                 </a:solidFill>
                 <a:latin typeface="Amiri" pitchFamily="2" charset="-78"/>
+                <a:ea typeface="Amiri" pitchFamily="2" charset="-78"/>
                 <a:cs typeface="Amiri" pitchFamily="2" charset="-78"/>
               </a:rPr>
               <a:t>الطَّالِبَةُ الَّتِي فَازَتْ</a:t>
@@ -59223,6 +59503,7 @@
                   <a:srgbClr val="1B3B6F"/>
                 </a:solidFill>
                 <a:latin typeface="Amiri" pitchFamily="2" charset="-78"/>
+                <a:ea typeface="Amiri" pitchFamily="2" charset="-78"/>
                 <a:cs typeface="Amiri" pitchFamily="2" charset="-78"/>
               </a:rPr>
               <a:t>الَّذِينَ</a:t>
@@ -59315,6 +59596,7 @@
                   <a:srgbClr val="8A6D1E"/>
                 </a:solidFill>
                 <a:latin typeface="Amiri" pitchFamily="2" charset="-78"/>
+                <a:ea typeface="Amiri" pitchFamily="2" charset="-78"/>
                 <a:cs typeface="Amiri" pitchFamily="2" charset="-78"/>
               </a:rPr>
               <a:t>الطُّلَّابُ الَّذِينَ حَضَرُوا</a:t>
@@ -59515,6 +59797,7 @@
                   <a:srgbClr val="1B3B6F"/>
                 </a:solidFill>
                 <a:latin typeface="Amiri" pitchFamily="2" charset="-78"/>
+                <a:ea typeface="Amiri" pitchFamily="2" charset="-78"/>
                 <a:cs typeface="Amiri" pitchFamily="2" charset="-78"/>
               </a:rPr>
               <a:t>جُمْلَةُ الصِّلَةِ</a:t>
@@ -59807,6 +60090,7 @@
                   <a:srgbClr val="1B3B6F"/>
                 </a:solidFill>
                 <a:latin typeface="Amiri" pitchFamily="2" charset="-78"/>
+                <a:ea typeface="Amiri" pitchFamily="2" charset="-78"/>
                 <a:cs typeface="Amiri" pitchFamily="2" charset="-78"/>
               </a:rPr>
               <a:t>الضَّمِيرُ الْعَائِدُ</a:t>
@@ -59899,6 +60183,7 @@
                   <a:srgbClr val="8A6D1E"/>
                 </a:solidFill>
                 <a:latin typeface="Amiri" pitchFamily="2" charset="-78"/>
+                <a:ea typeface="Amiri" pitchFamily="2" charset="-78"/>
                 <a:cs typeface="Amiri" pitchFamily="2" charset="-78"/>
               </a:rPr>
               <a:t>قَرَأْتُهُ</a:t>
@@ -60032,6 +60317,7 @@
                   <a:srgbClr val="D4AF37"/>
                 </a:solidFill>
                 <a:latin typeface="Amiri" pitchFamily="2" charset="-78"/>
+                <a:ea typeface="Amiri" pitchFamily="2" charset="-78"/>
                 <a:cs typeface="Amiri" pitchFamily="2" charset="-78"/>
               </a:rPr>
               <a:t>م</a:t>
@@ -60352,6 +60638,7 @@
                   <a:srgbClr val="8A6D1E"/>
                 </a:solidFill>
                 <a:latin typeface="Amiri" pitchFamily="2" charset="-78"/>
+                <a:ea typeface="Amiri" pitchFamily="2" charset="-78"/>
                 <a:cs typeface="Amiri" pitchFamily="2" charset="-78"/>
               </a:rPr>
               <a:t>الْأَسْمَاءُ الْمَوْصُولَةُ</a:t>
@@ -60594,6 +60881,7 @@
                   <a:srgbClr val="1B3B6F"/>
                 </a:solidFill>
                 <a:latin typeface="Amiri" pitchFamily="2" charset="-78"/>
+                <a:ea typeface="Amiri" pitchFamily="2" charset="-78"/>
                 <a:cs typeface="Amiri" pitchFamily="2" charset="-78"/>
               </a:rPr>
               <a:t>الطَّالِبُ الَّذِي فَازَ</a:t>
@@ -60632,6 +60920,7 @@
                   <a:srgbClr val="1B3B6F"/>
                 </a:solidFill>
                 <a:latin typeface="Amiri" pitchFamily="2" charset="-78"/>
+                <a:ea typeface="Amiri" pitchFamily="2" charset="-78"/>
                 <a:cs typeface="Amiri" pitchFamily="2" charset="-78"/>
               </a:rPr>
               <a:t>الَّذِي</a:t>
@@ -60800,6 +61089,7 @@
                   <a:srgbClr val="1B3B6F"/>
                 </a:solidFill>
                 <a:latin typeface="Amiri" pitchFamily="2" charset="-78"/>
+                <a:ea typeface="Amiri" pitchFamily="2" charset="-78"/>
                 <a:cs typeface="Amiri" pitchFamily="2" charset="-78"/>
               </a:rPr>
               <a:t>الطَّالِبَةُ الَّتِي فَازَتْ</a:t>
@@ -60838,6 +61128,7 @@
                   <a:srgbClr val="1B3B6F"/>
                 </a:solidFill>
                 <a:latin typeface="Amiri" pitchFamily="2" charset="-78"/>
+                <a:ea typeface="Amiri" pitchFamily="2" charset="-78"/>
                 <a:cs typeface="Amiri" pitchFamily="2" charset="-78"/>
               </a:rPr>
               <a:t>الَّتِي</a:t>
@@ -61006,6 +61297,7 @@
                   <a:srgbClr val="1B3B6F"/>
                 </a:solidFill>
                 <a:latin typeface="Amiri" pitchFamily="2" charset="-78"/>
+                <a:ea typeface="Amiri" pitchFamily="2" charset="-78"/>
                 <a:cs typeface="Amiri" pitchFamily="2" charset="-78"/>
               </a:rPr>
               <a:t>الطُّلَّابُ الَّذِينَ حَضَرُوا</a:t>
@@ -61044,6 +61336,7 @@
                   <a:srgbClr val="1B3B6F"/>
                 </a:solidFill>
                 <a:latin typeface="Amiri" pitchFamily="2" charset="-78"/>
+                <a:ea typeface="Amiri" pitchFamily="2" charset="-78"/>
                 <a:cs typeface="Amiri" pitchFamily="2" charset="-78"/>
               </a:rPr>
               <a:t>الَّذِينَ</a:t>
@@ -61212,6 +61505,7 @@
                   <a:srgbClr val="1B3B6F"/>
                 </a:solidFill>
                 <a:latin typeface="Amiri" pitchFamily="2" charset="-78"/>
+                <a:ea typeface="Amiri" pitchFamily="2" charset="-78"/>
                 <a:cs typeface="Amiri" pitchFamily="2" charset="-78"/>
               </a:rPr>
               <a:t>الطَّالِبَاتُ اللَّاتِي حَضَرْنَ</a:t>
@@ -61250,6 +61544,7 @@
                   <a:srgbClr val="1B3B6F"/>
                 </a:solidFill>
                 <a:latin typeface="Amiri" pitchFamily="2" charset="-78"/>
+                <a:ea typeface="Amiri" pitchFamily="2" charset="-78"/>
                 <a:cs typeface="Amiri" pitchFamily="2" charset="-78"/>
               </a:rPr>
               <a:t>اللَّاتِي</a:t>
@@ -61353,6 +61648,7 @@
                   <a:srgbClr val="1B3B6F"/>
                 </a:solidFill>
                 <a:latin typeface="Amiri" pitchFamily="2" charset="-78"/>
+                <a:ea typeface="Amiri" pitchFamily="2" charset="-78"/>
                 <a:cs typeface="Amiri" pitchFamily="2" charset="-78"/>
               </a:rPr>
               <a:t>الطَّالِبَانِ اللَّذَانِ نَجَحَا</a:t>
@@ -61391,6 +61687,7 @@
                   <a:srgbClr val="1B3B6F"/>
                 </a:solidFill>
                 <a:latin typeface="Amiri" pitchFamily="2" charset="-78"/>
+                <a:ea typeface="Amiri" pitchFamily="2" charset="-78"/>
                 <a:cs typeface="Amiri" pitchFamily="2" charset="-78"/>
               </a:rPr>
               <a:t>اللَّذَانِ</a:t>
@@ -61494,6 +61791,7 @@
                   <a:srgbClr val="1B3B6F"/>
                 </a:solidFill>
                 <a:latin typeface="Amiri" pitchFamily="2" charset="-78"/>
+                <a:ea typeface="Amiri" pitchFamily="2" charset="-78"/>
                 <a:cs typeface="Amiri" pitchFamily="2" charset="-78"/>
               </a:rPr>
               <a:t>الطَّالِبَتَانِ اللَّتَانِ نَجَحَتَا</a:t>
@@ -61532,6 +61830,7 @@
                   <a:srgbClr val="1B3B6F"/>
                 </a:solidFill>
                 <a:latin typeface="Amiri" pitchFamily="2" charset="-78"/>
+                <a:ea typeface="Amiri" pitchFamily="2" charset="-78"/>
                 <a:cs typeface="Amiri" pitchFamily="2" charset="-78"/>
               </a:rPr>
               <a:t>اللَّتَانِ</a:t>
@@ -61741,6 +62040,7 @@
                   <a:srgbClr val="D4AF37"/>
                 </a:solidFill>
                 <a:latin typeface="Amiri" pitchFamily="2" charset="-78"/>
+                <a:ea typeface="Amiri" pitchFamily="2" charset="-78"/>
                 <a:cs typeface="Amiri" pitchFamily="2" charset="-78"/>
               </a:rPr>
               <a:t>م</a:t>
@@ -62061,6 +62361,7 @@
                   <a:srgbClr val="8A6D1E"/>
                 </a:solidFill>
                 <a:latin typeface="Amiri" pitchFamily="2" charset="-78"/>
+                <a:ea typeface="Amiri" pitchFamily="2" charset="-78"/>
                 <a:cs typeface="Amiri" pitchFamily="2" charset="-78"/>
               </a:rPr>
               <a:t>الْمَوْصُوفُ · الْمَوْصُولُ · الصِّلَةُ</a:t>
@@ -62786,6 +63087,7 @@
                   <a:srgbClr val="1B3B6F"/>
                 </a:solidFill>
                 <a:latin typeface="Amiri" pitchFamily="2" charset="-78"/>
+                <a:ea typeface="Amiri" pitchFamily="2" charset="-78"/>
                 <a:cs typeface="Amiri" pitchFamily="2" charset="-78"/>
               </a:rPr>
               <a:t>أَعْرِفُ الْوَلَدَ الَّذِي يَسْكُنُ هُنَا.</a:t>
@@ -62885,6 +63187,7 @@
                   <a:srgbClr val="1B3B6F"/>
                 </a:solidFill>
                 <a:latin typeface="Amiri" pitchFamily="2" charset="-78"/>
+                <a:ea typeface="Amiri" pitchFamily="2" charset="-78"/>
                 <a:cs typeface="Amiri" pitchFamily="2" charset="-78"/>
               </a:rPr>
               <a:t>الطَّالِبُ الَّذِي يَدْرُسُ كَثِيرًا مُجْتَهِدٌ.</a:t>
@@ -62984,6 +63287,7 @@
                   <a:srgbClr val="1B3B6F"/>
                 </a:solidFill>
                 <a:latin typeface="Amiri" pitchFamily="2" charset="-78"/>
+                <a:ea typeface="Amiri" pitchFamily="2" charset="-78"/>
                 <a:cs typeface="Amiri" pitchFamily="2" charset="-78"/>
               </a:rPr>
               <a:t>الطَّالِبَةُ الَّتِي تَكْتُبُ</a:t>
@@ -63083,6 +63387,7 @@
                   <a:srgbClr val="1B3B6F"/>
                 </a:solidFill>
                 <a:latin typeface="Amiri" pitchFamily="2" charset="-78"/>
+                <a:ea typeface="Amiri" pitchFamily="2" charset="-78"/>
                 <a:cs typeface="Amiri" pitchFamily="2" charset="-78"/>
               </a:rPr>
               <a:t>الطَّالِبَاتُ اللَّاتِي يَكْتُبْنَ</a:t>
@@ -63219,13 +63524,9 @@
     <a:fontScheme name="Office">
       <a:majorFont>
         <a:latin typeface="Calibri Light" panose="020F0302020204030204"/>
-        <a:ea typeface=""/>
-        <a:cs typeface=""/>
-        <a:font script="Jpan" typeface="游ゴシック Light"/>
-        <a:font script="Hang" typeface="맑은 고딕"/>
-        <a:font script="Hans" typeface="等线 Light"/>
-        <a:font script="Hant" typeface="新細明體"/>
-        <a:font script="Arab" typeface="Times New Roman"/>
+        <a:ea typeface="Amiri" pitchFamily="2" charset="-78"/>
+        <a:cs typeface="Amiri" pitchFamily="2" charset="-78"/>
+        <a:font script="Arab" typeface="Amiri"/>
         <a:font script="Hebr" typeface="Times New Roman"/>
         <a:font script="Thai" typeface="Angsana New"/>
         <a:font script="Ethi" typeface="Nyala"/>
@@ -63271,13 +63572,9 @@
       </a:majorFont>
       <a:minorFont>
         <a:latin typeface="Calibri" panose="020F0502020204030204"/>
-        <a:ea typeface=""/>
-        <a:cs typeface=""/>
-        <a:font script="Jpan" typeface="游ゴシック"/>
-        <a:font script="Hang" typeface="맑은 고딕"/>
-        <a:font script="Hans" typeface="等线"/>
-        <a:font script="Hant" typeface="新細明體"/>
-        <a:font script="Arab" typeface="Arial"/>
+        <a:ea typeface="Amiri" pitchFamily="2" charset="-78"/>
+        <a:cs typeface="Amiri" pitchFamily="2" charset="-78"/>
+        <a:font script="Arab" typeface="Amiri"/>
         <a:font script="Hebr" typeface="Arial"/>
         <a:font script="Thai" typeface="Cordia New"/>
         <a:font script="Ethi" typeface="Nyala"/>
